--- a/GITA/Pre-Acceleration/2026-5h-AI-for-Startups/day2-slides.pptx
+++ b/GITA/Pre-Acceleration/2026-5h-AI-for-Startups/day2-slides.pptx
@@ -3431,7 +3431,7 @@
                 <a:cs typeface="Sylfaen"/>
                 <a:latin typeface="Sylfaen"/>
               </a:rPr>
-              <a:t>ფოკუსი: Visual identity, Copywriting, live Landing Page, Supabase ბაზა, Make.com ავტომატიზაცია, Demo Day და VC Grill.</a:t>
+              <a:t>ფოკუსი: Visual identity, Copywriting, live Landing Page, Supabase ბაზა, AI Pitch Deck &amp; Demo Day Prep, Demo Day და VC Grill.</a:t>
             </a:r>
           </a:p>
         </p:txBody>
@@ -6935,7 +6935,7 @@
                 <a:cs typeface="Sylfaen"/>
                 <a:latin typeface="Sylfaen"/>
               </a:rPr>
-              <a:t>საიტის მთავარი სურათის (Hero image) შექმნა Flux.1.1 Pro-თი:</a:t>
+              <a:t>საიტის მთავარი სურათის (Hero image) შექმნა Flux-თი:</a:t>
             </a:r>
           </a:p>
         </p:txBody>
@@ -7068,7 +7068,7 @@
                 <a:cs typeface="Sylfaen"/>
                 <a:latin typeface="Sylfaen"/>
               </a:rPr>
-              <a:t>🌟 Flux-ის მახასიათებლები:</a:t>
+              <a:t>🌟 Flux-ს მახასიათებლები:</a:t>
             </a:r>
           </a:p>
         </p:txBody>
@@ -14498,7 +14498,7 @@
                 <a:cs typeface="Sylfaen"/>
                 <a:latin typeface="Sylfaen"/>
               </a:rPr>
-              <a:t>3:20 - 4:25: Block IX: Database &amp; Make Automation (65 წთ)</a:t>
+              <a:t>3:10 - 4:00: Block IX: AI Pitch Deck Architecture &amp; Gamma (50 წთ)</a:t>
             </a:r>
           </a:p>
           <a:p>
@@ -14703,7 +14703,7 @@
         <p:spPr>
           <a:xfrm>
             <a:off x="4805172" y="2203704"/>
-            <a:ext cx="3771900" cy="713232"/>
+            <a:ext cx="3771900" cy="950976"/>
           </a:xfrm>
           <a:prstGeom prst="rect">
             <a:avLst/>
@@ -14730,7 +14730,7 @@
                 <a:cs typeface="Sylfaen"/>
                 <a:latin typeface="Sylfaen"/>
               </a:rPr>
-              <a:t>დღის ბოლოს თითოეულ მონაწილეს ექნება ცოცხალი MVP საიტი საკუთარ დომენზე Supabase მონაცემთა ბაზით, Make ავტომატიზაციითა და მზა Pitch Deck-ით.</a:t>
+              <a:t>დღის ბოლოს თითოეულ მონაწილეს ექნება ცოცხალი MVP საიტი საკუთარ დომენზე Supabase მონაცემთა ბაზით, 10-სლაიდიანი Gamma Pitch Deck-ითა და მომზადებული 3-წუთიანი პიჩით.</a:t>
             </a:r>
           </a:p>
         </p:txBody>
@@ -15520,7 +15520,7 @@
                           <a:cs typeface="Sylfaen"/>
                           <a:latin typeface="Sylfaen"/>
                         </a:rPr>
-                        <a:t>ტექნოლოგიები (React, Tailwind, Supabase, Make).</a:t>
+                        <a:t>ტექნოლოგიები (React, Tailwind, Supabase, GitHub).</a:t>
                       </a:r>
                     </a:p>
                   </a:txBody>
@@ -33669,7 +33669,7 @@
                 <a:cs typeface="Sylfaen"/>
                 <a:latin typeface="Sylfaen"/>
               </a:rPr>
-              <a:t>Make.com: Interface &amp; Workflow Scenarios</a:t>
+              <a:t>ინვესტორული Pitch Deck-ის ანატომია: 10 სლაიდის ოქროს სტანდარტი</a:t>
             </a:r>
           </a:p>
         </p:txBody>
@@ -33811,7 +33811,7 @@
                 <a:cs typeface="Sylfaen"/>
                 <a:latin typeface="Sylfaen"/>
               </a:rPr>
-              <a:t>ავტომატიზაციის ვიზუალური პლატფორმა Make.com:</a:t>
+              <a:t>როგორ იკვრება ინვესტორული პრეზენტაციის ნარატიული რკალი (Narrative Arc):</a:t>
             </a:r>
           </a:p>
         </p:txBody>
@@ -33877,6 +33877,452 @@
             </a:avLst>
           </a:prstGeom>
           <a:solidFill>
+            <a:srgbClr val="F8FAFC"/>
+          </a:solidFill>
+          <a:ln w="6350">
+            <a:solidFill>
+              <a:srgbClr val="E2E8F0"/>
+            </a:solidFill>
+          </a:ln>
+          <a:effectLst/>
+        </p:spPr>
+        <p:style>
+          <a:lnRef idx="1">
+            <a:schemeClr val="accent1"/>
+          </a:lnRef>
+          <a:fillRef idx="3">
+            <a:schemeClr val="accent1"/>
+          </a:fillRef>
+          <a:effectRef idx="2">
+            <a:schemeClr val="accent1"/>
+          </a:effectRef>
+          <a:fontRef idx="minor">
+            <a:schemeClr val="lt1"/>
+          </a:fontRef>
+        </p:style>
+        <p:txBody>
+          <a:bodyPr rtlCol="0" anchor="ctr"/>
+          <a:lstStyle/>
+          <a:p>
+            <a:pPr algn="ctr"/>
+          </a:p>
+        </p:txBody>
+      </p:sp>
+      <p:sp>
+        <p:nvSpPr>
+          <p:cNvPr id="11" name="TextBox 10"/>
+          <p:cNvSpPr txBox="1"/>
+          <p:nvPr/>
+        </p:nvSpPr>
+        <p:spPr>
+          <a:xfrm>
+            <a:off x="621792" y="1810512"/>
+            <a:ext cx="3771900" cy="320040"/>
+          </a:xfrm>
+          <a:prstGeom prst="rect">
+            <a:avLst/>
+          </a:prstGeom>
+          <a:noFill/>
+        </p:spPr>
+        <p:txBody>
+          <a:bodyPr wrap="square" anchor="t" lIns="54864" rIns="54864" tIns="54864" bIns="54864">
+            <a:spAutoFit/>
+          </a:bodyPr>
+          <a:lstStyle/>
+          <a:p>
+            <a:pPr>
+              <a:spcAft>
+                <a:spcPts val="400"/>
+              </a:spcAft>
+            </a:pPr>
+            <a:r>
+              <a:rPr sz="1400" b="1" i="0">
+                <a:solidFill>
+                  <a:srgbClr val="0F172A"/>
+                </a:solidFill>
+                <a:ea typeface="Sylfaen"/>
+                <a:cs typeface="Sylfaen"/>
+                <a:latin typeface="Sylfaen"/>
+              </a:rPr>
+              <a:t>📋 10 სლაიდის სტრუქტურა:</a:t>
+            </a:r>
+          </a:p>
+        </p:txBody>
+      </p:sp>
+      <p:sp>
+        <p:nvSpPr>
+          <p:cNvPr id="12" name="TextBox 11"/>
+          <p:cNvSpPr txBox="1"/>
+          <p:nvPr/>
+        </p:nvSpPr>
+        <p:spPr>
+          <a:xfrm>
+            <a:off x="621792" y="2203704"/>
+            <a:ext cx="3771900" cy="2574035"/>
+          </a:xfrm>
+          <a:prstGeom prst="rect">
+            <a:avLst/>
+          </a:prstGeom>
+          <a:noFill/>
+        </p:spPr>
+        <p:txBody>
+          <a:bodyPr wrap="square" anchor="t" lIns="54864" rIns="54864" tIns="54864" bIns="54864">
+            <a:spAutoFit/>
+          </a:bodyPr>
+          <a:lstStyle/>
+          <a:p>
+            <a:pPr algn="l">
+              <a:spcAft>
+                <a:spcPts val="300"/>
+              </a:spcAft>
+            </a:pPr>
+            <a:r>
+              <a:rPr sz="1300" b="1">
+                <a:solidFill>
+                  <a:srgbClr val="3730A3"/>
+                </a:solidFill>
+                <a:ea typeface="Sylfaen"/>
+                <a:cs typeface="Sylfaen"/>
+                <a:latin typeface="Sylfaen"/>
+              </a:rPr>
+              <a:t>1.  </a:t>
+            </a:r>
+            <a:r>
+              <a:rPr sz="1300">
+                <a:solidFill>
+                  <a:srgbClr val="0F172A"/>
+                </a:solidFill>
+                <a:ea typeface="Sylfaen"/>
+                <a:cs typeface="Sylfaen"/>
+                <a:latin typeface="Sylfaen"/>
+              </a:rPr>
+              <a:t>Hook &amp; Vision: 10-წამიანი დამაინტრიგებელი შესავალი</a:t>
+            </a:r>
+          </a:p>
+          <a:p>
+            <a:pPr algn="l">
+              <a:spcAft>
+                <a:spcPts val="300"/>
+              </a:spcAft>
+            </a:pPr>
+            <a:r>
+              <a:rPr sz="1300" b="1">
+                <a:solidFill>
+                  <a:srgbClr val="3730A3"/>
+                </a:solidFill>
+                <a:ea typeface="Sylfaen"/>
+                <a:cs typeface="Sylfaen"/>
+                <a:latin typeface="Sylfaen"/>
+              </a:rPr>
+              <a:t>2.  </a:t>
+            </a:r>
+            <a:r>
+              <a:rPr sz="1300">
+                <a:solidFill>
+                  <a:srgbClr val="0F172A"/>
+                </a:solidFill>
+                <a:ea typeface="Sylfaen"/>
+                <a:cs typeface="Sylfaen"/>
+                <a:latin typeface="Sylfaen"/>
+              </a:rPr>
+              <a:t>Problem: მტკივნეული ტკივილი და რეალური ქეისი</a:t>
+            </a:r>
+          </a:p>
+          <a:p>
+            <a:pPr algn="l">
+              <a:spcAft>
+                <a:spcPts val="300"/>
+              </a:spcAft>
+            </a:pPr>
+            <a:r>
+              <a:rPr sz="1300" b="1">
+                <a:solidFill>
+                  <a:srgbClr val="3730A3"/>
+                </a:solidFill>
+                <a:ea typeface="Sylfaen"/>
+                <a:cs typeface="Sylfaen"/>
+                <a:latin typeface="Sylfaen"/>
+              </a:rPr>
+              <a:t>3.  </a:t>
+            </a:r>
+            <a:r>
+              <a:rPr sz="1300">
+                <a:solidFill>
+                  <a:srgbClr val="0F172A"/>
+                </a:solidFill>
+                <a:ea typeface="Sylfaen"/>
+                <a:cs typeface="Sylfaen"/>
+                <a:latin typeface="Sylfaen"/>
+              </a:rPr>
+              <a:t>Solution: უნიკალური გადაწყვეტა (UVP)</a:t>
+            </a:r>
+          </a:p>
+          <a:p>
+            <a:pPr algn="l">
+              <a:spcAft>
+                <a:spcPts val="300"/>
+              </a:spcAft>
+            </a:pPr>
+            <a:r>
+              <a:rPr sz="1300" b="1">
+                <a:solidFill>
+                  <a:srgbClr val="3730A3"/>
+                </a:solidFill>
+                <a:ea typeface="Sylfaen"/>
+                <a:cs typeface="Sylfaen"/>
+                <a:latin typeface="Sylfaen"/>
+              </a:rPr>
+              <a:t>4.  </a:t>
+            </a:r>
+            <a:r>
+              <a:rPr sz="1300">
+                <a:solidFill>
+                  <a:srgbClr val="0F172A"/>
+                </a:solidFill>
+                <a:ea typeface="Sylfaen"/>
+                <a:cs typeface="Sylfaen"/>
+                <a:latin typeface="Sylfaen"/>
+              </a:rPr>
+              <a:t>Why Now? რატომ არის დღეს იდეალური დრო</a:t>
+            </a:r>
+          </a:p>
+          <a:p>
+            <a:pPr algn="l">
+              <a:spcAft>
+                <a:spcPts val="300"/>
+              </a:spcAft>
+            </a:pPr>
+            <a:r>
+              <a:rPr sz="1300" b="1">
+                <a:solidFill>
+                  <a:srgbClr val="3730A3"/>
+                </a:solidFill>
+                <a:ea typeface="Sylfaen"/>
+                <a:cs typeface="Sylfaen"/>
+                <a:latin typeface="Sylfaen"/>
+              </a:rPr>
+              <a:t>5.  </a:t>
+            </a:r>
+            <a:r>
+              <a:rPr sz="1300">
+                <a:solidFill>
+                  <a:srgbClr val="0F172A"/>
+                </a:solidFill>
+                <a:ea typeface="Sylfaen"/>
+                <a:cs typeface="Sylfaen"/>
+                <a:latin typeface="Sylfaen"/>
+              </a:rPr>
+              <a:t>Market Size: TAM, SAM, SOM რეალური ციფრებით</a:t>
+            </a:r>
+          </a:p>
+          <a:p>
+            <a:pPr algn="l">
+              <a:spcAft>
+                <a:spcPts val="300"/>
+              </a:spcAft>
+            </a:pPr>
+            <a:r>
+              <a:rPr sz="1300" b="1">
+                <a:solidFill>
+                  <a:srgbClr val="3730A3"/>
+                </a:solidFill>
+                <a:ea typeface="Sylfaen"/>
+                <a:cs typeface="Sylfaen"/>
+                <a:latin typeface="Sylfaen"/>
+              </a:rPr>
+              <a:t>6.  </a:t>
+            </a:r>
+            <a:r>
+              <a:rPr sz="1300">
+                <a:solidFill>
+                  <a:srgbClr val="0F172A"/>
+                </a:solidFill>
+                <a:ea typeface="Sylfaen"/>
+                <a:cs typeface="Sylfaen"/>
+                <a:latin typeface="Sylfaen"/>
+              </a:rPr>
+              <a:t>Product &amp; MVP: Lovable-ის დემო და ფუნქციონალი</a:t>
+            </a:r>
+          </a:p>
+          <a:p>
+            <a:pPr algn="l">
+              <a:spcAft>
+                <a:spcPts val="300"/>
+              </a:spcAft>
+            </a:pPr>
+            <a:r>
+              <a:rPr sz="1300" b="1">
+                <a:solidFill>
+                  <a:srgbClr val="3730A3"/>
+                </a:solidFill>
+                <a:ea typeface="Sylfaen"/>
+                <a:cs typeface="Sylfaen"/>
+                <a:latin typeface="Sylfaen"/>
+              </a:rPr>
+              <a:t>7.  </a:t>
+            </a:r>
+            <a:r>
+              <a:rPr sz="1300">
+                <a:solidFill>
+                  <a:srgbClr val="0F172A"/>
+                </a:solidFill>
+                <a:ea typeface="Sylfaen"/>
+                <a:cs typeface="Sylfaen"/>
+                <a:latin typeface="Sylfaen"/>
+              </a:rPr>
+              <a:t>Business Model: მონეტიზაცია და Pricing</a:t>
+            </a:r>
+          </a:p>
+          <a:p>
+            <a:pPr algn="l">
+              <a:spcAft>
+                <a:spcPts val="300"/>
+              </a:spcAft>
+            </a:pPr>
+            <a:r>
+              <a:rPr sz="1300" b="1">
+                <a:solidFill>
+                  <a:srgbClr val="3730A3"/>
+                </a:solidFill>
+                <a:ea typeface="Sylfaen"/>
+                <a:cs typeface="Sylfaen"/>
+                <a:latin typeface="Sylfaen"/>
+              </a:rPr>
+              <a:t>8.  </a:t>
+            </a:r>
+            <a:r>
+              <a:rPr sz="1300">
+                <a:solidFill>
+                  <a:srgbClr val="0F172A"/>
+                </a:solidFill>
+                <a:ea typeface="Sylfaen"/>
+                <a:cs typeface="Sylfaen"/>
+                <a:latin typeface="Sylfaen"/>
+              </a:rPr>
+              <a:t>Competition: რატომ ვერ დაგვაკოპირებენ (Moat)</a:t>
+            </a:r>
+          </a:p>
+          <a:p>
+            <a:pPr algn="l">
+              <a:spcAft>
+                <a:spcPts val="300"/>
+              </a:spcAft>
+            </a:pPr>
+            <a:r>
+              <a:rPr sz="1300" b="1">
+                <a:solidFill>
+                  <a:srgbClr val="3730A3"/>
+                </a:solidFill>
+                <a:ea typeface="Sylfaen"/>
+                <a:cs typeface="Sylfaen"/>
+                <a:latin typeface="Sylfaen"/>
+              </a:rPr>
+              <a:t>9.  </a:t>
+            </a:r>
+            <a:r>
+              <a:rPr sz="1300">
+                <a:solidFill>
+                  <a:srgbClr val="0F172A"/>
+                </a:solidFill>
+                <a:ea typeface="Sylfaen"/>
+                <a:cs typeface="Sylfaen"/>
+                <a:latin typeface="Sylfaen"/>
+              </a:rPr>
+              <a:t>Team: რატომ ჩვენ (Founder-Market Fit)</a:t>
+            </a:r>
+          </a:p>
+          <a:p>
+            <a:pPr algn="l">
+              <a:spcAft>
+                <a:spcPts val="300"/>
+              </a:spcAft>
+            </a:pPr>
+            <a:r>
+              <a:rPr sz="1300" b="1">
+                <a:solidFill>
+                  <a:srgbClr val="3730A3"/>
+                </a:solidFill>
+                <a:ea typeface="Sylfaen"/>
+                <a:cs typeface="Sylfaen"/>
+                <a:latin typeface="Sylfaen"/>
+              </a:rPr>
+              <a:t>10.  </a:t>
+            </a:r>
+            <a:r>
+              <a:rPr sz="1300">
+                <a:solidFill>
+                  <a:srgbClr val="0F172A"/>
+                </a:solidFill>
+                <a:ea typeface="Sylfaen"/>
+                <a:cs typeface="Sylfaen"/>
+                <a:latin typeface="Sylfaen"/>
+              </a:rPr>
+              <a:t>The Ask: 25,000₾ გრანტი და 6-თვიანი Roadmap</a:t>
+            </a:r>
+          </a:p>
+        </p:txBody>
+      </p:sp>
+      <p:sp>
+        <p:nvSpPr>
+          <p:cNvPr id="13" name="Rectangle 12"/>
+          <p:cNvSpPr/>
+          <p:nvPr/>
+        </p:nvSpPr>
+        <p:spPr>
+          <a:xfrm>
+            <a:off x="4640580" y="1737360"/>
+            <a:ext cx="54864" cy="3113532"/>
+          </a:xfrm>
+          <a:prstGeom prst="rect">
+            <a:avLst/>
+          </a:prstGeom>
+          <a:solidFill>
+            <a:srgbClr val="3730A3"/>
+          </a:solidFill>
+          <a:ln>
+            <a:noFill/>
+          </a:ln>
+          <a:effectLst/>
+        </p:spPr>
+        <p:style>
+          <a:lnRef idx="1">
+            <a:schemeClr val="accent1"/>
+          </a:lnRef>
+          <a:fillRef idx="3">
+            <a:schemeClr val="accent1"/>
+          </a:fillRef>
+          <a:effectRef idx="2">
+            <a:schemeClr val="accent1"/>
+          </a:effectRef>
+          <a:fontRef idx="minor">
+            <a:schemeClr val="lt1"/>
+          </a:fontRef>
+        </p:style>
+        <p:txBody>
+          <a:bodyPr rtlCol="0" anchor="ctr"/>
+          <a:lstStyle/>
+          <a:p>
+            <a:pPr algn="ctr"/>
+          </a:p>
+        </p:txBody>
+      </p:sp>
+      <p:sp>
+        <p:nvSpPr>
+          <p:cNvPr id="14" name="Rounded Rectangle 13"/>
+          <p:cNvSpPr/>
+          <p:nvPr/>
+        </p:nvSpPr>
+        <p:spPr>
+          <a:xfrm>
+            <a:off x="4695444" y="1737360"/>
+            <a:ext cx="3991356" cy="3113532"/>
+          </a:xfrm>
+          <a:prstGeom prst="roundRect">
+            <a:avLst>
+              <a:gd name="adj" fmla="val 4000"/>
+            </a:avLst>
+          </a:prstGeom>
+          <a:solidFill>
             <a:srgbClr val="EEF2FF"/>
           </a:solidFill>
           <a:ln w="6350">
@@ -33910,13 +34356,13 @@
       </p:sp>
       <p:sp>
         <p:nvSpPr>
-          <p:cNvPr id="11" name="TextBox 10"/>
+          <p:cNvPr id="15" name="TextBox 14"/>
           <p:cNvSpPr txBox="1"/>
           <p:nvPr/>
         </p:nvSpPr>
         <p:spPr>
           <a:xfrm>
-            <a:off x="621792" y="1810512"/>
+            <a:off x="4805172" y="1810512"/>
             <a:ext cx="3771900" cy="320040"/>
           </a:xfrm>
           <a:prstGeom prst="rect">
@@ -33944,21 +34390,21 @@
                 <a:cs typeface="Sylfaen"/>
                 <a:latin typeface="Sylfaen"/>
               </a:rPr>
-              <a:t>📋 ვის რაში გამოგადგებათ (გუნდური ქეისები):</a:t>
-            </a:r>
-          </a:p>
-        </p:txBody>
-      </p:sp>
-      <p:sp>
-        <p:nvSpPr>
-          <p:cNvPr id="12" name="TextBox 11"/>
+              <a:t>🌟 ოქროს წესები:</a:t>
+            </a:r>
+          </a:p>
+        </p:txBody>
+      </p:sp>
+      <p:sp>
+        <p:nvSpPr>
+          <p:cNvPr id="16" name="TextBox 15"/>
           <p:cNvSpPr txBox="1"/>
           <p:nvPr/>
         </p:nvSpPr>
         <p:spPr>
           <a:xfrm>
-            <a:off x="621792" y="2203704"/>
-            <a:ext cx="3771900" cy="2574035"/>
+            <a:off x="4805172" y="2203704"/>
+            <a:ext cx="3771900" cy="1188720"/>
           </a:xfrm>
           <a:prstGeom prst="rect">
             <a:avLst/>
@@ -33971,24 +34417,13 @@
           </a:bodyPr>
           <a:lstStyle/>
           <a:p>
-            <a:pPr algn="l">
-              <a:spcAft>
-                <a:spcPts val="300"/>
-              </a:spcAft>
-            </a:pPr>
-            <a:r>
-              <a:rPr sz="1300" b="1">
-                <a:solidFill>
-                  <a:srgbClr val="3730A3"/>
-                </a:solidFill>
-                <a:ea typeface="Sylfaen"/>
-                <a:cs typeface="Sylfaen"/>
-                <a:latin typeface="Sylfaen"/>
-              </a:rPr>
-              <a:t>▸  </a:t>
-            </a:r>
-            <a:r>
-              <a:rPr sz="1300">
+            <a:pPr>
+              <a:spcAft>
+                <a:spcPts val="400"/>
+              </a:spcAft>
+            </a:pPr>
+            <a:r>
+              <a:rPr sz="1300" b="0" i="0">
                 <a:solidFill>
                   <a:srgbClr val="0F172A"/>
                 </a:solidFill>
@@ -33996,143 +34431,27 @@
                 <a:cs typeface="Sylfaen"/>
                 <a:latin typeface="Sylfaen"/>
               </a:rPr>
-              <a:t>🏥 Health &amp; Med (Team 1, 2): შეკვეთების &amp; ჯავშნების ავტომატური SMS/Email შეტყობინებები კლიენტებთან და ექიმებთან.</a:t>
-            </a:r>
-          </a:p>
-          <a:p>
-            <a:pPr algn="l">
-              <a:spcAft>
-                <a:spcPts val="300"/>
-              </a:spcAft>
-            </a:pPr>
-            <a:r>
-              <a:rPr sz="1300" b="1">
-                <a:solidFill>
-                  <a:srgbClr val="3730A3"/>
-                </a:solidFill>
-                <a:ea typeface="Sylfaen"/>
-                <a:cs typeface="Sylfaen"/>
-                <a:latin typeface="Sylfaen"/>
-              </a:rPr>
-              <a:t>▸  </a:t>
-            </a:r>
-            <a:r>
-              <a:rPr sz="1300">
-                <a:solidFill>
-                  <a:srgbClr val="0F172A"/>
-                </a:solidFill>
-                <a:ea typeface="Sylfaen"/>
-                <a:cs typeface="Sylfaen"/>
-                <a:latin typeface="Sylfaen"/>
-              </a:rPr>
-              <a:t>🛡️ Travel &amp; Samachablo (Team 9, 10): მომხმარებლისგან მიღებული პანიკის/საფრთხის სიგნალების მყისიერი გაგზავნა Telegram Bot-ში ან Slack-ში.</a:t>
-            </a:r>
-          </a:p>
-          <a:p>
-            <a:pPr algn="l">
-              <a:spcAft>
-                <a:spcPts val="300"/>
-              </a:spcAft>
-            </a:pPr>
-            <a:r>
-              <a:rPr sz="1300" b="1">
-                <a:solidFill>
-                  <a:srgbClr val="3730A3"/>
-                </a:solidFill>
-                <a:ea typeface="Sylfaen"/>
-                <a:cs typeface="Sylfaen"/>
-                <a:latin typeface="Sylfaen"/>
-              </a:rPr>
-              <a:t>▸  </a:t>
-            </a:r>
-            <a:r>
-              <a:rPr sz="1300">
-                <a:solidFill>
-                  <a:srgbClr val="0F172A"/>
-                </a:solidFill>
-                <a:ea typeface="Sylfaen"/>
-                <a:cs typeface="Sylfaen"/>
-                <a:latin typeface="Sylfaen"/>
-              </a:rPr>
-              <a:t>⚖️ Legal &amp; Compliance (Team 4, 5): გენერირებული PDF დოკუმენტების ავტომატური ატვირთვა Google Drive-ში და კლიენტთან გაგზავნა.</a:t>
-            </a:r>
-          </a:p>
-          <a:p>
-            <a:pPr algn="l">
-              <a:spcAft>
-                <a:spcPts val="300"/>
-              </a:spcAft>
-            </a:pPr>
-            <a:r>
-              <a:rPr sz="1300" b="1">
-                <a:solidFill>
-                  <a:srgbClr val="3730A3"/>
-                </a:solidFill>
-                <a:ea typeface="Sylfaen"/>
-                <a:cs typeface="Sylfaen"/>
-                <a:latin typeface="Sylfaen"/>
-              </a:rPr>
-              <a:t>▸  </a:t>
-            </a:r>
-            <a:r>
-              <a:rPr sz="1300">
-                <a:solidFill>
-                  <a:srgbClr val="0F172A"/>
-                </a:solidFill>
-                <a:ea typeface="Sylfaen"/>
-                <a:cs typeface="Sylfaen"/>
-                <a:latin typeface="Sylfaen"/>
-              </a:rPr>
-              <a:t>🎒 EdTech (Team 6, 8): Early Adopters-ის ბაზის შევსება Sheets CRM-ში და Welcome-Email-ის გაგზავნა სასწავლო გზამკვლევით.</a:t>
-            </a:r>
-          </a:p>
-          <a:p>
-            <a:pPr algn="l">
-              <a:spcAft>
-                <a:spcPts val="300"/>
-              </a:spcAft>
-            </a:pPr>
-            <a:r>
-              <a:rPr sz="1300" b="1">
-                <a:solidFill>
-                  <a:srgbClr val="3730A3"/>
-                </a:solidFill>
-                <a:ea typeface="Sylfaen"/>
-                <a:cs typeface="Sylfaen"/>
-                <a:latin typeface="Sylfaen"/>
-              </a:rPr>
-              <a:t>▸  </a:t>
-            </a:r>
-            <a:r>
-              <a:rPr sz="1300">
-                <a:solidFill>
-                  <a:srgbClr val="0F172A"/>
-                </a:solidFill>
-                <a:ea typeface="Sylfaen"/>
-                <a:cs typeface="Sylfaen"/>
-                <a:latin typeface="Sylfaen"/>
-              </a:rPr>
-              <a:t>📝 Productivity (Team 7): Smart Diary-ის დავალებების სინქრონიზაცია Google Calendar-სა და Notion-თან.</a:t>
-            </a:r>
-          </a:p>
-        </p:txBody>
-      </p:sp>
-      <p:sp>
-        <p:nvSpPr>
-          <p:cNvPr id="13" name="Rectangle 12"/>
-          <p:cNvSpPr/>
-          <p:nvPr/>
-        </p:nvSpPr>
-        <p:spPr>
-          <a:xfrm>
-            <a:off x="4640580" y="1737360"/>
-            <a:ext cx="54864" cy="3113532"/>
-          </a:xfrm>
-          <a:prstGeom prst="rect">
-            <a:avLst/>
-          </a:prstGeom>
-          <a:solidFill>
-            <a:srgbClr val="3730A3"/>
+              <a:t>• 1 სლაიდი = 1 მთავარი აზრი: არ გადატვირთოთ ტექსტით! • სლაიდი მთხრობელი არ არის: სლაიდზე არის მხოლოდ ვიზუალური დასტური და ციფრები — მთავარი მთხრობელი ხართ თქვენ. • Traction Beats Everything: თუ გაქვთ თუნდაც 10 დარეგისტრირებული მომხმარებელი საიტზე, ეს 10x ზრდის ნდობას.</a:t>
+            </a:r>
+          </a:p>
+        </p:txBody>
+      </p:sp>
+      <p:sp>
+        <p:nvSpPr>
+          <p:cNvPr id="17" name="Rectangle 16"/>
+          <p:cNvSpPr/>
+          <p:nvPr/>
+        </p:nvSpPr>
+        <p:spPr>
+          <a:xfrm>
+            <a:off x="457200" y="4850892"/>
+            <a:ext cx="8229600" cy="13716"/>
+          </a:xfrm>
+          <a:prstGeom prst="rect">
+            <a:avLst/>
+          </a:prstGeom>
+          <a:solidFill>
+            <a:srgbClr val="E2E8F0"/>
           </a:solidFill>
           <a:ln>
             <a:noFill/>
@@ -34163,263 +34482,7 @@
       </p:sp>
       <p:sp>
         <p:nvSpPr>
-          <p:cNvPr id="14" name="Rounded Rectangle 13"/>
-          <p:cNvSpPr/>
-          <p:nvPr/>
-        </p:nvSpPr>
-        <p:spPr>
-          <a:xfrm>
-            <a:off x="4695444" y="1737360"/>
-            <a:ext cx="3991356" cy="3113532"/>
-          </a:xfrm>
-          <a:prstGeom prst="roundRect">
-            <a:avLst>
-              <a:gd name="adj" fmla="val 4000"/>
-            </a:avLst>
-          </a:prstGeom>
-          <a:solidFill>
-            <a:srgbClr val="F8FAFC"/>
-          </a:solidFill>
-          <a:ln w="6350">
-            <a:solidFill>
-              <a:srgbClr val="E2E8F0"/>
-            </a:solidFill>
-          </a:ln>
-          <a:effectLst/>
-        </p:spPr>
-        <p:style>
-          <a:lnRef idx="1">
-            <a:schemeClr val="accent1"/>
-          </a:lnRef>
-          <a:fillRef idx="3">
-            <a:schemeClr val="accent1"/>
-          </a:fillRef>
-          <a:effectRef idx="2">
-            <a:schemeClr val="accent1"/>
-          </a:effectRef>
-          <a:fontRef idx="minor">
-            <a:schemeClr val="lt1"/>
-          </a:fontRef>
-        </p:style>
-        <p:txBody>
-          <a:bodyPr rtlCol="0" anchor="ctr"/>
-          <a:lstStyle/>
-          <a:p>
-            <a:pPr algn="ctr"/>
-          </a:p>
-        </p:txBody>
-      </p:sp>
-      <p:sp>
-        <p:nvSpPr>
-          <p:cNvPr id="15" name="TextBox 14"/>
-          <p:cNvSpPr txBox="1"/>
-          <p:nvPr/>
-        </p:nvSpPr>
-        <p:spPr>
-          <a:xfrm>
-            <a:off x="4805172" y="1810512"/>
-            <a:ext cx="3771900" cy="320040"/>
-          </a:xfrm>
-          <a:prstGeom prst="rect">
-            <a:avLst/>
-          </a:prstGeom>
-          <a:noFill/>
-        </p:spPr>
-        <p:txBody>
-          <a:bodyPr wrap="square" anchor="t" lIns="54864" rIns="54864" tIns="54864" bIns="54864">
-            <a:spAutoFit/>
-          </a:bodyPr>
-          <a:lstStyle/>
-          <a:p>
-            <a:pPr>
-              <a:spcAft>
-                <a:spcPts val="400"/>
-              </a:spcAft>
-            </a:pPr>
-            <a:r>
-              <a:rPr sz="1400" b="1" i="0">
-                <a:solidFill>
-                  <a:srgbClr val="0F172A"/>
-                </a:solidFill>
-                <a:ea typeface="Sylfaen"/>
-                <a:cs typeface="Sylfaen"/>
-                <a:latin typeface="Sylfaen"/>
-              </a:rPr>
-              <a:t>🚀 Make.com-ის უპირატესობა:</a:t>
-            </a:r>
-          </a:p>
-        </p:txBody>
-      </p:sp>
-      <p:sp>
-        <p:nvSpPr>
-          <p:cNvPr id="16" name="TextBox 15"/>
-          <p:cNvSpPr txBox="1"/>
-          <p:nvPr/>
-        </p:nvSpPr>
-        <p:spPr>
-          <a:xfrm>
-            <a:off x="4805172" y="2203704"/>
-            <a:ext cx="3771900" cy="713232"/>
-          </a:xfrm>
-          <a:prstGeom prst="rect">
-            <a:avLst/>
-          </a:prstGeom>
-          <a:noFill/>
-        </p:spPr>
-        <p:txBody>
-          <a:bodyPr wrap="square" anchor="t" lIns="54864" rIns="54864" tIns="54864" bIns="54864">
-            <a:spAutoFit/>
-          </a:bodyPr>
-          <a:lstStyle/>
-          <a:p>
-            <a:pPr>
-              <a:spcAft>
-                <a:spcPts val="400"/>
-              </a:spcAft>
-            </a:pPr>
-            <a:r>
-              <a:rPr sz="1300" b="0" i="0">
-                <a:solidFill>
-                  <a:srgbClr val="0F172A"/>
-                </a:solidFill>
-                <a:ea typeface="Sylfaen"/>
-                <a:cs typeface="Sylfaen"/>
-                <a:latin typeface="Sylfaen"/>
-              </a:rPr>
-              <a:t>ის არის No-Code "ძრავი", რომელიც თქვენს Lovable საიტს აკავშირებს ნებისმიერ გარე სერვისთან (Email, CRM, Sheets, Telegram, Slack) 100% უფასოდ და მარტივად.</a:t>
-            </a:r>
-          </a:p>
-        </p:txBody>
-      </p:sp>
-      <p:sp>
-        <p:nvSpPr>
-          <p:cNvPr id="17" name="TextBox 16"/>
-          <p:cNvSpPr txBox="1"/>
-          <p:nvPr/>
-        </p:nvSpPr>
-        <p:spPr>
-          <a:xfrm>
-            <a:off x="4805172" y="2990088"/>
-            <a:ext cx="3771900" cy="320040"/>
-          </a:xfrm>
-          <a:prstGeom prst="rect">
-            <a:avLst/>
-          </a:prstGeom>
-          <a:noFill/>
-        </p:spPr>
-        <p:txBody>
-          <a:bodyPr wrap="square" anchor="t" lIns="54864" rIns="54864" tIns="54864" bIns="54864">
-            <a:spAutoFit/>
-          </a:bodyPr>
-          <a:lstStyle/>
-          <a:p>
-            <a:pPr>
-              <a:spcAft>
-                <a:spcPts val="400"/>
-              </a:spcAft>
-            </a:pPr>
-            <a:r>
-              <a:rPr sz="1400" b="1" i="0">
-                <a:solidFill>
-                  <a:srgbClr val="0F172A"/>
-                </a:solidFill>
-                <a:ea typeface="Sylfaen"/>
-                <a:cs typeface="Sylfaen"/>
-                <a:latin typeface="Sylfaen"/>
-              </a:rPr>
-              <a:t>📦 ძირითადი ცნებები:</a:t>
-            </a:r>
-          </a:p>
-        </p:txBody>
-      </p:sp>
-      <p:sp>
-        <p:nvSpPr>
           <p:cNvPr id="18" name="TextBox 17"/>
-          <p:cNvSpPr txBox="1"/>
-          <p:nvPr/>
-        </p:nvSpPr>
-        <p:spPr>
-          <a:xfrm>
-            <a:off x="4805172" y="3383280"/>
-            <a:ext cx="3771900" cy="713232"/>
-          </a:xfrm>
-          <a:prstGeom prst="rect">
-            <a:avLst/>
-          </a:prstGeom>
-          <a:noFill/>
-        </p:spPr>
-        <p:txBody>
-          <a:bodyPr wrap="square" anchor="t" lIns="54864" rIns="54864" tIns="54864" bIns="54864">
-            <a:spAutoFit/>
-          </a:bodyPr>
-          <a:lstStyle/>
-          <a:p>
-            <a:pPr>
-              <a:spcAft>
-                <a:spcPts val="400"/>
-              </a:spcAft>
-            </a:pPr>
-            <a:r>
-              <a:rPr sz="1300" b="0" i="0">
-                <a:solidFill>
-                  <a:srgbClr val="0F172A"/>
-                </a:solidFill>
-                <a:ea typeface="Sylfaen"/>
-                <a:cs typeface="Sylfaen"/>
-                <a:latin typeface="Sylfaen"/>
-              </a:rPr>
-              <a:t>Scenario: ავტომატიზაციის სქემა · Module: აპლიკაციის ბლოკი (მაგ: Gmail) · Webhook: მყისიერი რეაგირების ტრიგერი.</a:t>
-            </a:r>
-          </a:p>
-        </p:txBody>
-      </p:sp>
-      <p:sp>
-        <p:nvSpPr>
-          <p:cNvPr id="19" name="Rectangle 18"/>
-          <p:cNvSpPr/>
-          <p:nvPr/>
-        </p:nvSpPr>
-        <p:spPr>
-          <a:xfrm>
-            <a:off x="457200" y="4850892"/>
-            <a:ext cx="8229600" cy="13716"/>
-          </a:xfrm>
-          <a:prstGeom prst="rect">
-            <a:avLst/>
-          </a:prstGeom>
-          <a:solidFill>
-            <a:srgbClr val="E2E8F0"/>
-          </a:solidFill>
-          <a:ln>
-            <a:noFill/>
-          </a:ln>
-          <a:effectLst/>
-        </p:spPr>
-        <p:style>
-          <a:lnRef idx="1">
-            <a:schemeClr val="accent1"/>
-          </a:lnRef>
-          <a:fillRef idx="3">
-            <a:schemeClr val="accent1"/>
-          </a:fillRef>
-          <a:effectRef idx="2">
-            <a:schemeClr val="accent1"/>
-          </a:effectRef>
-          <a:fontRef idx="minor">
-            <a:schemeClr val="lt1"/>
-          </a:fontRef>
-        </p:style>
-        <p:txBody>
-          <a:bodyPr rtlCol="0" anchor="ctr"/>
-          <a:lstStyle/>
-          <a:p>
-            <a:pPr algn="ctr"/>
-          </a:p>
-        </p:txBody>
-      </p:sp>
-      <p:sp>
-        <p:nvSpPr>
-          <p:cNvPr id="20" name="TextBox 19"/>
           <p:cNvSpPr txBox="1"/>
           <p:nvPr/>
         </p:nvSpPr>
@@ -35820,7 +35883,7 @@
                 <a:cs typeface="Sylfaen"/>
                 <a:latin typeface="Sylfaen"/>
               </a:rPr>
-              <a:t>Make.com: Webhooks setup &amp; JSON mapping</a:t>
+              <a:t>Gamma: AI პრეზენტაციების დიზაინი 15 წუთში</a:t>
             </a:r>
           </a:p>
         </p:txBody>
@@ -35962,7 +36025,7 @@
                 <a:cs typeface="Sylfaen"/>
                 <a:latin typeface="Sylfaen"/>
               </a:rPr>
-              <a:t>მონაცემთა მყისიერი მიღება საიტიდან (Webhook):</a:t>
+              <a:t>როგორ მუშაობს Gamma და რატომ არის იდეალური სტარტაპებისთვის:</a:t>
             </a:r>
           </a:p>
         </p:txBody>
@@ -35976,13 +36039,13 @@
         <p:spPr>
           <a:xfrm>
             <a:off x="457200" y="1737360"/>
-            <a:ext cx="54864" cy="1581912"/>
-          </a:xfrm>
-          <a:prstGeom prst="rect">
-            <a:avLst/>
-          </a:prstGeom>
-          <a:solidFill>
-            <a:srgbClr val="4F46E5"/>
+            <a:ext cx="54864" cy="3113532"/>
+          </a:xfrm>
+          <a:prstGeom prst="rect">
+            <a:avLst/>
+          </a:prstGeom>
+          <a:solidFill>
+            <a:srgbClr val="3730A3"/>
           </a:solidFill>
           <a:ln>
             <a:noFill/>
@@ -36020,7 +36083,7 @@
         <p:spPr>
           <a:xfrm>
             <a:off x="512064" y="1737360"/>
-            <a:ext cx="3991356" cy="1581912"/>
+            <a:ext cx="3991356" cy="3113532"/>
           </a:xfrm>
           <a:prstGeom prst="roundRect">
             <a:avLst>
@@ -36028,6 +36091,278 @@
             </a:avLst>
           </a:prstGeom>
           <a:solidFill>
+            <a:srgbClr val="EEF2FF"/>
+          </a:solidFill>
+          <a:ln w="6350">
+            <a:solidFill>
+              <a:srgbClr val="3730A3"/>
+            </a:solidFill>
+          </a:ln>
+          <a:effectLst/>
+        </p:spPr>
+        <p:style>
+          <a:lnRef idx="1">
+            <a:schemeClr val="accent1"/>
+          </a:lnRef>
+          <a:fillRef idx="3">
+            <a:schemeClr val="accent1"/>
+          </a:fillRef>
+          <a:effectRef idx="2">
+            <a:schemeClr val="accent1"/>
+          </a:effectRef>
+          <a:fontRef idx="minor">
+            <a:schemeClr val="lt1"/>
+          </a:fontRef>
+        </p:style>
+        <p:txBody>
+          <a:bodyPr rtlCol="0" anchor="ctr"/>
+          <a:lstStyle/>
+          <a:p>
+            <a:pPr algn="ctr"/>
+          </a:p>
+        </p:txBody>
+      </p:sp>
+      <p:sp>
+        <p:nvSpPr>
+          <p:cNvPr id="11" name="TextBox 10"/>
+          <p:cNvSpPr txBox="1"/>
+          <p:nvPr/>
+        </p:nvSpPr>
+        <p:spPr>
+          <a:xfrm>
+            <a:off x="621792" y="1810512"/>
+            <a:ext cx="3771900" cy="320040"/>
+          </a:xfrm>
+          <a:prstGeom prst="rect">
+            <a:avLst/>
+          </a:prstGeom>
+          <a:noFill/>
+        </p:spPr>
+        <p:txBody>
+          <a:bodyPr wrap="square" anchor="t" lIns="54864" rIns="54864" tIns="54864" bIns="54864">
+            <a:spAutoFit/>
+          </a:bodyPr>
+          <a:lstStyle/>
+          <a:p>
+            <a:pPr>
+              <a:spcAft>
+                <a:spcPts val="400"/>
+              </a:spcAft>
+            </a:pPr>
+            <a:r>
+              <a:rPr sz="1400" b="1" i="0">
+                <a:solidFill>
+                  <a:srgbClr val="0F172A"/>
+                </a:solidFill>
+                <a:ea typeface="Sylfaen"/>
+                <a:cs typeface="Sylfaen"/>
+                <a:latin typeface="Sylfaen"/>
+              </a:rPr>
+              <a:t>🚀 Gamma-ს ძირითადი შესაძლებლობები:</a:t>
+            </a:r>
+          </a:p>
+        </p:txBody>
+      </p:sp>
+      <p:sp>
+        <p:nvSpPr>
+          <p:cNvPr id="12" name="TextBox 11"/>
+          <p:cNvSpPr txBox="1"/>
+          <p:nvPr/>
+        </p:nvSpPr>
+        <p:spPr>
+          <a:xfrm>
+            <a:off x="621792" y="2203704"/>
+            <a:ext cx="3771900" cy="2574035"/>
+          </a:xfrm>
+          <a:prstGeom prst="rect">
+            <a:avLst/>
+          </a:prstGeom>
+          <a:noFill/>
+        </p:spPr>
+        <p:txBody>
+          <a:bodyPr wrap="square" anchor="t" lIns="54864" rIns="54864" tIns="54864" bIns="54864">
+            <a:spAutoFit/>
+          </a:bodyPr>
+          <a:lstStyle/>
+          <a:p>
+            <a:pPr algn="l">
+              <a:spcAft>
+                <a:spcPts val="300"/>
+              </a:spcAft>
+            </a:pPr>
+            <a:r>
+              <a:rPr sz="1300" b="1">
+                <a:solidFill>
+                  <a:srgbClr val="3730A3"/>
+                </a:solidFill>
+                <a:ea typeface="Sylfaen"/>
+                <a:cs typeface="Sylfaen"/>
+                <a:latin typeface="Sylfaen"/>
+              </a:rPr>
+              <a:t>▸  </a:t>
+            </a:r>
+            <a:r>
+              <a:rPr sz="1300">
+                <a:solidFill>
+                  <a:srgbClr val="0F172A"/>
+                </a:solidFill>
+                <a:ea typeface="Sylfaen"/>
+                <a:cs typeface="Sylfaen"/>
+                <a:latin typeface="Sylfaen"/>
+              </a:rPr>
+              <a:t>Text to Deck: Claude-ის მიერ დაწერილი Markdown Outline გადაჰყავს სრულ სლაიდებში;</a:t>
+            </a:r>
+          </a:p>
+          <a:p>
+            <a:pPr algn="l">
+              <a:spcAft>
+                <a:spcPts val="300"/>
+              </a:spcAft>
+            </a:pPr>
+            <a:r>
+              <a:rPr sz="1300" b="1">
+                <a:solidFill>
+                  <a:srgbClr val="3730A3"/>
+                </a:solidFill>
+                <a:ea typeface="Sylfaen"/>
+                <a:cs typeface="Sylfaen"/>
+                <a:latin typeface="Sylfaen"/>
+              </a:rPr>
+              <a:t>▸  </a:t>
+            </a:r>
+            <a:r>
+              <a:rPr sz="1300">
+                <a:solidFill>
+                  <a:srgbClr val="0F172A"/>
+                </a:solidFill>
+                <a:ea typeface="Sylfaen"/>
+                <a:cs typeface="Sylfaen"/>
+                <a:latin typeface="Sylfaen"/>
+              </a:rPr>
+              <a:t>Smart Card Layouts: სვეტები, ტაიმლაინები, სტატისტიკის ბარათები;</a:t>
+            </a:r>
+          </a:p>
+          <a:p>
+            <a:pPr algn="l">
+              <a:spcAft>
+                <a:spcPts val="300"/>
+              </a:spcAft>
+            </a:pPr>
+            <a:r>
+              <a:rPr sz="1300" b="1">
+                <a:solidFill>
+                  <a:srgbClr val="3730A3"/>
+                </a:solidFill>
+                <a:ea typeface="Sylfaen"/>
+                <a:cs typeface="Sylfaen"/>
+                <a:latin typeface="Sylfaen"/>
+              </a:rPr>
+              <a:t>▸  </a:t>
+            </a:r>
+            <a:r>
+              <a:rPr sz="1300">
+                <a:solidFill>
+                  <a:srgbClr val="0F172A"/>
+                </a:solidFill>
+                <a:ea typeface="Sylfaen"/>
+                <a:cs typeface="Sylfaen"/>
+                <a:latin typeface="Sylfaen"/>
+              </a:rPr>
+              <a:t>Brand Themes: ფერებისა და ფონტების მორგება თქვენს Ideogram ლოგოზე;</a:t>
+            </a:r>
+          </a:p>
+          <a:p>
+            <a:pPr algn="l">
+              <a:spcAft>
+                <a:spcPts val="300"/>
+              </a:spcAft>
+            </a:pPr>
+            <a:r>
+              <a:rPr sz="1300" b="1">
+                <a:solidFill>
+                  <a:srgbClr val="3730A3"/>
+                </a:solidFill>
+                <a:ea typeface="Sylfaen"/>
+                <a:cs typeface="Sylfaen"/>
+                <a:latin typeface="Sylfaen"/>
+              </a:rPr>
+              <a:t>▸  </a:t>
+            </a:r>
+            <a:r>
+              <a:rPr sz="1300">
+                <a:solidFill>
+                  <a:srgbClr val="0F172A"/>
+                </a:solidFill>
+                <a:ea typeface="Sylfaen"/>
+                <a:cs typeface="Sylfaen"/>
+                <a:latin typeface="Sylfaen"/>
+              </a:rPr>
+              <a:t>Universal Export: ექსპორტი PDF/PowerPoint-ში ან ცოცხალი ვებ-ბმულის გაზიარება.</a:t>
+            </a:r>
+          </a:p>
+        </p:txBody>
+      </p:sp>
+      <p:sp>
+        <p:nvSpPr>
+          <p:cNvPr id="13" name="Rectangle 12"/>
+          <p:cNvSpPr/>
+          <p:nvPr/>
+        </p:nvSpPr>
+        <p:spPr>
+          <a:xfrm>
+            <a:off x="4640580" y="1737360"/>
+            <a:ext cx="54864" cy="3113532"/>
+          </a:xfrm>
+          <a:prstGeom prst="rect">
+            <a:avLst/>
+          </a:prstGeom>
+          <a:solidFill>
+            <a:srgbClr val="4F46E5"/>
+          </a:solidFill>
+          <a:ln>
+            <a:noFill/>
+          </a:ln>
+          <a:effectLst/>
+        </p:spPr>
+        <p:style>
+          <a:lnRef idx="1">
+            <a:schemeClr val="accent1"/>
+          </a:lnRef>
+          <a:fillRef idx="3">
+            <a:schemeClr val="accent1"/>
+          </a:fillRef>
+          <a:effectRef idx="2">
+            <a:schemeClr val="accent1"/>
+          </a:effectRef>
+          <a:fontRef idx="minor">
+            <a:schemeClr val="lt1"/>
+          </a:fontRef>
+        </p:style>
+        <p:txBody>
+          <a:bodyPr rtlCol="0" anchor="ctr"/>
+          <a:lstStyle/>
+          <a:p>
+            <a:pPr algn="ctr"/>
+          </a:p>
+        </p:txBody>
+      </p:sp>
+      <p:sp>
+        <p:nvSpPr>
+          <p:cNvPr id="14" name="Rounded Rectangle 13"/>
+          <p:cNvSpPr/>
+          <p:nvPr/>
+        </p:nvSpPr>
+        <p:spPr>
+          <a:xfrm>
+            <a:off x="4695444" y="1737360"/>
+            <a:ext cx="3991356" cy="3113532"/>
+          </a:xfrm>
+          <a:prstGeom prst="roundRect">
+            <a:avLst>
+              <a:gd name="adj" fmla="val 4000"/>
+            </a:avLst>
+          </a:prstGeom>
+          <a:solidFill>
             <a:srgbClr val="FFF7ED"/>
           </a:solidFill>
           <a:ln w="6350">
@@ -36061,13 +36396,13 @@
       </p:sp>
       <p:sp>
         <p:nvSpPr>
-          <p:cNvPr id="11" name="TextBox 10"/>
+          <p:cNvPr id="15" name="TextBox 14"/>
           <p:cNvSpPr txBox="1"/>
           <p:nvPr/>
         </p:nvSpPr>
         <p:spPr>
           <a:xfrm>
-            <a:off x="621792" y="1810512"/>
+            <a:off x="4805172" y="1810512"/>
             <a:ext cx="3771900" cy="320040"/>
           </a:xfrm>
           <a:prstGeom prst="rect">
@@ -36095,21 +36430,21 @@
                 <a:cs typeface="Sylfaen"/>
                 <a:latin typeface="Sylfaen"/>
               </a:rPr>
-              <a:t>🌐 რა არის Webhook?</a:t>
-            </a:r>
-          </a:p>
-        </p:txBody>
-      </p:sp>
-      <p:sp>
-        <p:nvSpPr>
-          <p:cNvPr id="12" name="TextBox 11"/>
+              <a:t>💡 Pro-Tip Gamma-სთვის:</a:t>
+            </a:r>
+          </a:p>
+        </p:txBody>
+      </p:sp>
+      <p:sp>
+        <p:nvSpPr>
+          <p:cNvPr id="16" name="TextBox 15"/>
           <p:cNvSpPr txBox="1"/>
           <p:nvPr/>
         </p:nvSpPr>
         <p:spPr>
           <a:xfrm>
-            <a:off x="621792" y="2203704"/>
-            <a:ext cx="3771900" cy="713232"/>
+            <a:off x="4805172" y="2203704"/>
+            <a:ext cx="3771900" cy="950976"/>
           </a:xfrm>
           <a:prstGeom prst="rect">
             <a:avLst/>
@@ -36136,181 +36471,7 @@
                 <a:cs typeface="Sylfaen"/>
                 <a:latin typeface="Sylfaen"/>
               </a:rPr>
-              <a:t>ეს არის URL მისამართი Make.com-ში, რომელიც ელოდება მონაცემების გამოგზავნას საიტიდან. ყოველი ფორმის შევსებისას Lovable აგზავნის მონაცემებს ამ მისამართზე.</a:t>
-            </a:r>
-          </a:p>
-        </p:txBody>
-      </p:sp>
-      <p:sp>
-        <p:nvSpPr>
-          <p:cNvPr id="13" name="Rectangle 12"/>
-          <p:cNvSpPr/>
-          <p:nvPr/>
-        </p:nvSpPr>
-        <p:spPr>
-          <a:xfrm>
-            <a:off x="4640580" y="1737360"/>
-            <a:ext cx="54864" cy="1581912"/>
-          </a:xfrm>
-          <a:prstGeom prst="rect">
-            <a:avLst/>
-          </a:prstGeom>
-          <a:solidFill>
-            <a:srgbClr val="3730A3"/>
-          </a:solidFill>
-          <a:ln>
-            <a:noFill/>
-          </a:ln>
-          <a:effectLst/>
-        </p:spPr>
-        <p:style>
-          <a:lnRef idx="1">
-            <a:schemeClr val="accent1"/>
-          </a:lnRef>
-          <a:fillRef idx="3">
-            <a:schemeClr val="accent1"/>
-          </a:fillRef>
-          <a:effectRef idx="2">
-            <a:schemeClr val="accent1"/>
-          </a:effectRef>
-          <a:fontRef idx="minor">
-            <a:schemeClr val="lt1"/>
-          </a:fontRef>
-        </p:style>
-        <p:txBody>
-          <a:bodyPr rtlCol="0" anchor="ctr"/>
-          <a:lstStyle/>
-          <a:p>
-            <a:pPr algn="ctr"/>
-          </a:p>
-        </p:txBody>
-      </p:sp>
-      <p:sp>
-        <p:nvSpPr>
-          <p:cNvPr id="14" name="Rounded Rectangle 13"/>
-          <p:cNvSpPr/>
-          <p:nvPr/>
-        </p:nvSpPr>
-        <p:spPr>
-          <a:xfrm>
-            <a:off x="4695444" y="1737360"/>
-            <a:ext cx="3991356" cy="1581912"/>
-          </a:xfrm>
-          <a:prstGeom prst="roundRect">
-            <a:avLst>
-              <a:gd name="adj" fmla="val 4000"/>
-            </a:avLst>
-          </a:prstGeom>
-          <a:solidFill>
-            <a:srgbClr val="F8FAFC"/>
-          </a:solidFill>
-          <a:ln w="6350">
-            <a:solidFill>
-              <a:srgbClr val="E2E8F0"/>
-            </a:solidFill>
-          </a:ln>
-          <a:effectLst/>
-        </p:spPr>
-        <p:style>
-          <a:lnRef idx="1">
-            <a:schemeClr val="accent1"/>
-          </a:lnRef>
-          <a:fillRef idx="3">
-            <a:schemeClr val="accent1"/>
-          </a:fillRef>
-          <a:effectRef idx="2">
-            <a:schemeClr val="accent1"/>
-          </a:effectRef>
-          <a:fontRef idx="minor">
-            <a:schemeClr val="lt1"/>
-          </a:fontRef>
-        </p:style>
-        <p:txBody>
-          <a:bodyPr rtlCol="0" anchor="ctr"/>
-          <a:lstStyle/>
-          <a:p>
-            <a:pPr algn="ctr"/>
-          </a:p>
-        </p:txBody>
-      </p:sp>
-      <p:sp>
-        <p:nvSpPr>
-          <p:cNvPr id="15" name="TextBox 14"/>
-          <p:cNvSpPr txBox="1"/>
-          <p:nvPr/>
-        </p:nvSpPr>
-        <p:spPr>
-          <a:xfrm>
-            <a:off x="4805172" y="1810512"/>
-            <a:ext cx="3771900" cy="320040"/>
-          </a:xfrm>
-          <a:prstGeom prst="rect">
-            <a:avLst/>
-          </a:prstGeom>
-          <a:noFill/>
-        </p:spPr>
-        <p:txBody>
-          <a:bodyPr wrap="square" anchor="t" lIns="54864" rIns="54864" tIns="54864" bIns="54864">
-            <a:spAutoFit/>
-          </a:bodyPr>
-          <a:lstStyle/>
-          <a:p>
-            <a:pPr>
-              <a:spcAft>
-                <a:spcPts val="400"/>
-              </a:spcAft>
-            </a:pPr>
-            <a:r>
-              <a:rPr sz="1400" b="1" i="0">
-                <a:solidFill>
-                  <a:srgbClr val="0F172A"/>
-                </a:solidFill>
-                <a:ea typeface="Sylfaen"/>
-                <a:cs typeface="Sylfaen"/>
-                <a:latin typeface="Sylfaen"/>
-              </a:rPr>
-              <a:t>⚙️ JSON Mapping:</a:t>
-            </a:r>
-          </a:p>
-        </p:txBody>
-      </p:sp>
-      <p:sp>
-        <p:nvSpPr>
-          <p:cNvPr id="16" name="TextBox 15"/>
-          <p:cNvSpPr txBox="1"/>
-          <p:nvPr/>
-        </p:nvSpPr>
-        <p:spPr>
-          <a:xfrm>
-            <a:off x="4805172" y="2203704"/>
-            <a:ext cx="3771900" cy="713232"/>
-          </a:xfrm>
-          <a:prstGeom prst="rect">
-            <a:avLst/>
-          </a:prstGeom>
-          <a:noFill/>
-        </p:spPr>
-        <p:txBody>
-          <a:bodyPr wrap="square" anchor="t" lIns="54864" rIns="54864" tIns="54864" bIns="54864">
-            <a:spAutoFit/>
-          </a:bodyPr>
-          <a:lstStyle/>
-          <a:p>
-            <a:pPr>
-              <a:spcAft>
-                <a:spcPts val="400"/>
-              </a:spcAft>
-            </a:pPr>
-            <a:r>
-              <a:rPr sz="1300" b="0" i="0">
-                <a:solidFill>
-                  <a:srgbClr val="0F172A"/>
-                </a:solidFill>
-                <a:ea typeface="Sylfaen"/>
-                <a:cs typeface="Sylfaen"/>
-                <a:latin typeface="Sylfaen"/>
-              </a:rPr>
-              <a:t>Webhook-ის გააქტიურების შემდეგ გაუშვით ტესტური რეგისტრაცია საიტზე, რათა Make-მა ავტომატურად ამოიცნოს ცვლადები (Email, Name).</a:t>
+              <a:t>არ გამოიყენოთ Gamma-ს 1-წინადადებიანი გენერატორი! საუკეთესო შედეგისთვის: ჯერ Claude-ში გაამზადეთ 10 სლაიდის დეტალური ტექსტი, შემდეგ კი ჩასვით Gamma-ში (Generate → Paste in text).</a:t>
             </a:r>
           </a:p>
         </p:txBody>
@@ -36581,7 +36742,7 @@
                 <a:cs typeface="Sylfaen"/>
                 <a:latin typeface="Sylfaen"/>
               </a:rPr>
-              <a:t>🛠️ პრაქტიკული დავალება #4: Automation Workflow Make.com-ში (30 წუთი)</a:t>
+              <a:t>🛠️ პრაქტიკული დავალება #4: 10-სლაიდიანი Pitch Deck Gamma-ში (30 წუთი)</a:t>
             </a:r>
           </a:p>
         </p:txBody>
@@ -36723,7 +36884,7 @@
                 <a:cs typeface="Sylfaen"/>
                 <a:latin typeface="Sylfaen"/>
               </a:rPr>
-              <a:t>ააწყვეთ ავტომატიზაციის სქემა Make.com-ზე:</a:t>
+              <a:t>შექმენით თქვენი სტარტაპის Pitch Deck-ი:</a:t>
             </a:r>
           </a:p>
         </p:txBody>
@@ -36870,7 +37031,7 @@
         <p:spPr>
           <a:xfrm>
             <a:off x="621792" y="2203704"/>
-            <a:ext cx="3771900" cy="2267712"/>
+            <a:ext cx="3771900" cy="2574035"/>
           </a:xfrm>
           <a:prstGeom prst="rect">
             <a:avLst/>
@@ -36908,7 +37069,7 @@
                 <a:cs typeface="Sylfaen"/>
                 <a:latin typeface="Sylfaen"/>
               </a:rPr>
-              <a:t>შექმენით ანგარიში Make.com -ზე და დაიწყეთ Scenario;</a:t>
+              <a:t>გახსენით Claude და ჩასვით გვერდითა პრომპტი;</a:t>
             </a:r>
           </a:p>
           <a:p>
@@ -36937,7 +37098,7 @@
                 <a:cs typeface="Sylfaen"/>
                 <a:latin typeface="Sylfaen"/>
               </a:rPr>
-              <a:t>დაამატეთ Webhook trigger და დაუკავშირეთ თქვენს Landing Page-ს;</a:t>
+              <a:t>მიღებული 10-სლაიდიანი სტრუქტურა დააკოპირეთ;</a:t>
             </a:r>
           </a:p>
           <a:p>
@@ -36966,7 +37127,65 @@
                 <a:cs typeface="Sylfaen"/>
                 <a:latin typeface="Sylfaen"/>
               </a:rPr>
-              <a:t>დაამატეთ Gmail/SMTP და Google Sheets მოდულები და გააკეთეთ mapping.</a:t>
+              <a:t>გახსენით Gamma.app → Generate → Paste in text;</a:t>
+            </a:r>
+          </a:p>
+          <a:p>
+            <a:pPr algn="l">
+              <a:spcAft>
+                <a:spcPts val="300"/>
+              </a:spcAft>
+            </a:pPr>
+            <a:r>
+              <a:rPr sz="1300" b="1">
+                <a:solidFill>
+                  <a:srgbClr val="3730A3"/>
+                </a:solidFill>
+                <a:ea typeface="Sylfaen"/>
+                <a:cs typeface="Sylfaen"/>
+                <a:latin typeface="Sylfaen"/>
+              </a:rPr>
+              <a:t>▸  </a:t>
+            </a:r>
+            <a:r>
+              <a:rPr sz="1300">
+                <a:solidFill>
+                  <a:srgbClr val="0F172A"/>
+                </a:solidFill>
+                <a:ea typeface="Sylfaen"/>
+                <a:cs typeface="Sylfaen"/>
+                <a:latin typeface="Sylfaen"/>
+              </a:rPr>
+              <a:t>აირჩიეთ თემა, ჩასვით Ideogram-ის ლოგო და Lovable MVP-ის ლინკი/სქრინშოტი;</a:t>
+            </a:r>
+          </a:p>
+          <a:p>
+            <a:pPr algn="l">
+              <a:spcAft>
+                <a:spcPts val="300"/>
+              </a:spcAft>
+            </a:pPr>
+            <a:r>
+              <a:rPr sz="1300" b="1">
+                <a:solidFill>
+                  <a:srgbClr val="3730A3"/>
+                </a:solidFill>
+                <a:ea typeface="Sylfaen"/>
+                <a:cs typeface="Sylfaen"/>
+                <a:latin typeface="Sylfaen"/>
+              </a:rPr>
+              <a:t>▸  </a:t>
+            </a:r>
+            <a:r>
+              <a:rPr sz="1300">
+                <a:solidFill>
+                  <a:srgbClr val="0F172A"/>
+                </a:solidFill>
+                <a:ea typeface="Sylfaen"/>
+                <a:cs typeface="Sylfaen"/>
+                <a:latin typeface="Sylfaen"/>
+              </a:rPr>
+              <a:t>დააექსპორტეთ PDF ან შეინახეთ ბმული.</a:t>
             </a:r>
           </a:p>
         </p:txBody>
@@ -36979,8 +37198,8 @@
         </p:nvSpPr>
         <p:spPr>
           <a:xfrm>
-            <a:off x="621792" y="4544568"/>
-            <a:ext cx="54864" cy="233171"/>
+            <a:off x="4640580" y="1737360"/>
+            <a:ext cx="54864" cy="3113532"/>
           </a:xfrm>
           <a:prstGeom prst="rect">
             <a:avLst/>
@@ -37023,8 +37242,8 @@
         </p:nvSpPr>
         <p:spPr>
           <a:xfrm>
-            <a:off x="676656" y="4544568"/>
-            <a:ext cx="3717036" cy="233171"/>
+            <a:off x="4695444" y="1737360"/>
+            <a:ext cx="3991356" cy="3113532"/>
           </a:xfrm>
           <a:prstGeom prst="roundRect">
             <a:avLst>
@@ -37034,6 +37253,98 @@
           <a:solidFill>
             <a:srgbClr val="F8FAFC"/>
           </a:solidFill>
+          <a:ln w="6350">
+            <a:solidFill>
+              <a:srgbClr val="3730A3"/>
+            </a:solidFill>
+          </a:ln>
+          <a:effectLst/>
+        </p:spPr>
+        <p:style>
+          <a:lnRef idx="1">
+            <a:schemeClr val="accent1"/>
+          </a:lnRef>
+          <a:fillRef idx="3">
+            <a:schemeClr val="accent1"/>
+          </a:fillRef>
+          <a:effectRef idx="2">
+            <a:schemeClr val="accent1"/>
+          </a:effectRef>
+          <a:fontRef idx="minor">
+            <a:schemeClr val="lt1"/>
+          </a:fontRef>
+        </p:style>
+        <p:txBody>
+          <a:bodyPr rtlCol="0" anchor="ctr"/>
+          <a:lstStyle/>
+          <a:p>
+            <a:pPr algn="ctr"/>
+          </a:p>
+        </p:txBody>
+      </p:sp>
+      <p:sp>
+        <p:nvSpPr>
+          <p:cNvPr id="15" name="Rectangle 14"/>
+          <p:cNvSpPr/>
+          <p:nvPr/>
+        </p:nvSpPr>
+        <p:spPr>
+          <a:xfrm>
+            <a:off x="4805172" y="1810512"/>
+            <a:ext cx="54864" cy="292608"/>
+          </a:xfrm>
+          <a:prstGeom prst="rect">
+            <a:avLst/>
+          </a:prstGeom>
+          <a:solidFill>
+            <a:srgbClr val="3730A3"/>
+          </a:solidFill>
+          <a:ln>
+            <a:noFill/>
+          </a:ln>
+          <a:effectLst/>
+        </p:spPr>
+        <p:style>
+          <a:lnRef idx="1">
+            <a:schemeClr val="accent1"/>
+          </a:lnRef>
+          <a:fillRef idx="3">
+            <a:schemeClr val="accent1"/>
+          </a:fillRef>
+          <a:effectRef idx="2">
+            <a:schemeClr val="accent1"/>
+          </a:effectRef>
+          <a:fontRef idx="minor">
+            <a:schemeClr val="lt1"/>
+          </a:fontRef>
+        </p:style>
+        <p:txBody>
+          <a:bodyPr rtlCol="0" anchor="ctr"/>
+          <a:lstStyle/>
+          <a:p>
+            <a:pPr algn="ctr"/>
+          </a:p>
+        </p:txBody>
+      </p:sp>
+      <p:sp>
+        <p:nvSpPr>
+          <p:cNvPr id="16" name="Rounded Rectangle 15"/>
+          <p:cNvSpPr/>
+          <p:nvPr/>
+        </p:nvSpPr>
+        <p:spPr>
+          <a:xfrm>
+            <a:off x="4860036" y="1810512"/>
+            <a:ext cx="3717036" cy="292608"/>
+          </a:xfrm>
+          <a:prstGeom prst="roundRect">
+            <a:avLst>
+              <a:gd name="adj" fmla="val 4000"/>
+            </a:avLst>
+          </a:prstGeom>
+          <a:solidFill>
+            <a:srgbClr val="F8FAFC"/>
+          </a:solidFill>
           <a:ln w="9525">
             <a:solidFill>
               <a:srgbClr val="E2E8F0"/>
@@ -37065,23 +37376,25 @@
       </p:sp>
       <p:sp>
         <p:nvSpPr>
-          <p:cNvPr id="15" name="Rectangle 14"/>
-          <p:cNvSpPr/>
-          <p:nvPr/>
-        </p:nvSpPr>
-        <p:spPr>
-          <a:xfrm>
-            <a:off x="4640580" y="1737360"/>
-            <a:ext cx="54864" cy="3113532"/>
-          </a:xfrm>
-          <a:prstGeom prst="rect">
-            <a:avLst/>
-          </a:prstGeom>
-          <a:solidFill>
-            <a:srgbClr val="3730A3"/>
-          </a:solidFill>
-          <a:ln>
-            <a:noFill/>
+          <p:cNvPr id="17" name="Rectangle 16"/>
+          <p:cNvSpPr/>
+          <p:nvPr/>
+        </p:nvSpPr>
+        <p:spPr>
+          <a:xfrm>
+            <a:off x="4914900" y="1865376"/>
+            <a:ext cx="3552444" cy="201168"/>
+          </a:xfrm>
+          <a:prstGeom prst="rect">
+            <a:avLst/>
+          </a:prstGeom>
+          <a:solidFill>
+            <a:srgbClr val="FFFFFF"/>
+          </a:solidFill>
+          <a:ln w="6350">
+            <a:solidFill>
+              <a:srgbClr val="E2E8F0"/>
+            </a:solidFill>
           </a:ln>
           <a:effectLst/>
         </p:spPr>
@@ -37109,14 +37422,73 @@
       </p:sp>
       <p:sp>
         <p:nvSpPr>
-          <p:cNvPr id="16" name="Rounded Rectangle 15"/>
-          <p:cNvSpPr/>
-          <p:nvPr/>
-        </p:nvSpPr>
-        <p:spPr>
-          <a:xfrm>
-            <a:off x="4695444" y="1737360"/>
-            <a:ext cx="3991356" cy="3113532"/>
+          <p:cNvPr id="18" name="TextBox 17"/>
+          <p:cNvSpPr txBox="1"/>
+          <p:nvPr/>
+        </p:nvSpPr>
+        <p:spPr>
+          <a:xfrm>
+            <a:off x="4969764" y="1892807"/>
+            <a:ext cx="3442716" cy="146304"/>
+          </a:xfrm>
+          <a:prstGeom prst="rect">
+            <a:avLst/>
+          </a:prstGeom>
+          <a:noFill/>
+        </p:spPr>
+        <p:txBody>
+          <a:bodyPr wrap="square" anchor="t" lIns="54864" rIns="54864" tIns="54864" bIns="54864">
+            <a:spAutoFit/>
+          </a:bodyPr>
+          <a:lstStyle/>
+          <a:p>
+            <a:pPr>
+              <a:spcAft>
+                <a:spcPts val="0"/>
+              </a:spcAft>
+            </a:pPr>
+            <a:r>
+              <a:rPr sz="800">
+                <a:solidFill>
+                  <a:srgbClr val="0F172A"/>
+                </a:solidFill>
+                <a:ea typeface="Consolas"/>
+                <a:cs typeface="Consolas"/>
+                <a:latin typeface="Consolas"/>
+              </a:rPr>
+              <a:t>Full 10-Slide Pitch Deck</a:t>
+            </a:r>
+          </a:p>
+          <a:p>
+            <a:pPr>
+              <a:spcAft>
+                <a:spcPts val="0"/>
+              </a:spcAft>
+            </a:pPr>
+            <a:r>
+              <a:rPr sz="800">
+                <a:solidFill>
+                  <a:srgbClr val="0F172A"/>
+                </a:solidFill>
+                <a:ea typeface="Consolas"/>
+                <a:cs typeface="Consolas"/>
+                <a:latin typeface="Consolas"/>
+              </a:rPr>
+              <a:t>Prompt (Claude):</a:t>
+            </a:r>
+          </a:p>
+        </p:txBody>
+      </p:sp>
+      <p:sp>
+        <p:nvSpPr>
+          <p:cNvPr id="19" name="Rounded Rectangle 18"/>
+          <p:cNvSpPr/>
+          <p:nvPr/>
+        </p:nvSpPr>
+        <p:spPr>
+          <a:xfrm>
+            <a:off x="4805172" y="2176272"/>
+            <a:ext cx="3771900" cy="2601468"/>
           </a:xfrm>
           <a:prstGeom prst="roundRect">
             <a:avLst>
@@ -37126,98 +37498,6 @@
           <a:solidFill>
             <a:srgbClr val="F8FAFC"/>
           </a:solidFill>
-          <a:ln w="6350">
-            <a:solidFill>
-              <a:srgbClr val="3730A3"/>
-            </a:solidFill>
-          </a:ln>
-          <a:effectLst/>
-        </p:spPr>
-        <p:style>
-          <a:lnRef idx="1">
-            <a:schemeClr val="accent1"/>
-          </a:lnRef>
-          <a:fillRef idx="3">
-            <a:schemeClr val="accent1"/>
-          </a:fillRef>
-          <a:effectRef idx="2">
-            <a:schemeClr val="accent1"/>
-          </a:effectRef>
-          <a:fontRef idx="minor">
-            <a:schemeClr val="lt1"/>
-          </a:fontRef>
-        </p:style>
-        <p:txBody>
-          <a:bodyPr rtlCol="0" anchor="ctr"/>
-          <a:lstStyle/>
-          <a:p>
-            <a:pPr algn="ctr"/>
-          </a:p>
-        </p:txBody>
-      </p:sp>
-      <p:sp>
-        <p:nvSpPr>
-          <p:cNvPr id="17" name="Rectangle 16"/>
-          <p:cNvSpPr/>
-          <p:nvPr/>
-        </p:nvSpPr>
-        <p:spPr>
-          <a:xfrm>
-            <a:off x="4805172" y="1810512"/>
-            <a:ext cx="54864" cy="292608"/>
-          </a:xfrm>
-          <a:prstGeom prst="rect">
-            <a:avLst/>
-          </a:prstGeom>
-          <a:solidFill>
-            <a:srgbClr val="3730A3"/>
-          </a:solidFill>
-          <a:ln>
-            <a:noFill/>
-          </a:ln>
-          <a:effectLst/>
-        </p:spPr>
-        <p:style>
-          <a:lnRef idx="1">
-            <a:schemeClr val="accent1"/>
-          </a:lnRef>
-          <a:fillRef idx="3">
-            <a:schemeClr val="accent1"/>
-          </a:fillRef>
-          <a:effectRef idx="2">
-            <a:schemeClr val="accent1"/>
-          </a:effectRef>
-          <a:fontRef idx="minor">
-            <a:schemeClr val="lt1"/>
-          </a:fontRef>
-        </p:style>
-        <p:txBody>
-          <a:bodyPr rtlCol="0" anchor="ctr"/>
-          <a:lstStyle/>
-          <a:p>
-            <a:pPr algn="ctr"/>
-          </a:p>
-        </p:txBody>
-      </p:sp>
-      <p:sp>
-        <p:nvSpPr>
-          <p:cNvPr id="18" name="Rounded Rectangle 17"/>
-          <p:cNvSpPr/>
-          <p:nvPr/>
-        </p:nvSpPr>
-        <p:spPr>
-          <a:xfrm>
-            <a:off x="4860036" y="1810512"/>
-            <a:ext cx="3717036" cy="292608"/>
-          </a:xfrm>
-          <a:prstGeom prst="roundRect">
-            <a:avLst>
-              <a:gd name="adj" fmla="val 4000"/>
-            </a:avLst>
-          </a:prstGeom>
-          <a:solidFill>
-            <a:srgbClr val="F8FAFC"/>
-          </a:solidFill>
           <a:ln w="9525">
             <a:solidFill>
               <a:srgbClr val="E2E8F0"/>
@@ -37249,14 +37529,14 @@
       </p:sp>
       <p:sp>
         <p:nvSpPr>
-          <p:cNvPr id="19" name="Rectangle 18"/>
-          <p:cNvSpPr/>
-          <p:nvPr/>
-        </p:nvSpPr>
-        <p:spPr>
-          <a:xfrm>
-            <a:off x="4914900" y="1865376"/>
-            <a:ext cx="3552444" cy="201168"/>
+          <p:cNvPr id="20" name="Rectangle 19"/>
+          <p:cNvSpPr/>
+          <p:nvPr/>
+        </p:nvSpPr>
+        <p:spPr>
+          <a:xfrm>
+            <a:off x="4860036" y="2221991"/>
+            <a:ext cx="3662172" cy="2510027"/>
           </a:xfrm>
           <a:prstGeom prst="rect">
             <a:avLst/>
@@ -37295,14 +37575,14 @@
       </p:sp>
       <p:sp>
         <p:nvSpPr>
-          <p:cNvPr id="20" name="TextBox 19"/>
+          <p:cNvPr id="21" name="TextBox 20"/>
           <p:cNvSpPr txBox="1"/>
           <p:nvPr/>
         </p:nvSpPr>
         <p:spPr>
           <a:xfrm>
-            <a:off x="4969764" y="1892807"/>
-            <a:ext cx="3442716" cy="146304"/>
+            <a:off x="4914900" y="2240279"/>
+            <a:ext cx="3552444" cy="2473451"/>
           </a:xfrm>
           <a:prstGeom prst="rect">
             <a:avLst/>
@@ -37321,7 +37601,7 @@
               </a:spcAft>
             </a:pPr>
             <a:r>
-              <a:rPr sz="800">
+              <a:rPr sz="1000">
                 <a:solidFill>
                   <a:srgbClr val="0F172A"/>
                 </a:solidFill>
@@ -37329,7 +37609,7 @@
                 <a:cs typeface="Consolas"/>
                 <a:latin typeface="Consolas"/>
               </a:rPr>
-              <a:t>Make.com სცენარის</a:t>
+              <a:t>მე მაქვს სტარტაპი:</a:t>
             </a:r>
           </a:p>
           <a:p>
@@ -37339,7 +37619,7 @@
               </a:spcAft>
             </a:pPr>
             <a:r>
-              <a:rPr sz="800">
+              <a:rPr sz="1000">
                 <a:solidFill>
                   <a:srgbClr val="0F172A"/>
                 </a:solidFill>
@@ -37347,126 +37627,9 @@
                 <a:cs typeface="Consolas"/>
                 <a:latin typeface="Consolas"/>
               </a:rPr>
-              <a:t>კონფიგურაცია:</a:t>
-            </a:r>
-          </a:p>
-        </p:txBody>
-      </p:sp>
-      <p:sp>
-        <p:nvSpPr>
-          <p:cNvPr id="21" name="Rounded Rectangle 20"/>
-          <p:cNvSpPr/>
-          <p:nvPr/>
-        </p:nvSpPr>
-        <p:spPr>
-          <a:xfrm>
-            <a:off x="4805172" y="2176272"/>
-            <a:ext cx="3771900" cy="2601468"/>
-          </a:xfrm>
-          <a:prstGeom prst="roundRect">
-            <a:avLst>
-              <a:gd name="adj" fmla="val 4000"/>
-            </a:avLst>
-          </a:prstGeom>
-          <a:solidFill>
-            <a:srgbClr val="F8FAFC"/>
-          </a:solidFill>
-          <a:ln w="9525">
-            <a:solidFill>
-              <a:srgbClr val="E2E8F0"/>
-            </a:solidFill>
-          </a:ln>
-          <a:effectLst/>
-        </p:spPr>
-        <p:style>
-          <a:lnRef idx="1">
-            <a:schemeClr val="accent1"/>
-          </a:lnRef>
-          <a:fillRef idx="3">
-            <a:schemeClr val="accent1"/>
-          </a:fillRef>
-          <a:effectRef idx="2">
-            <a:schemeClr val="accent1"/>
-          </a:effectRef>
-          <a:fontRef idx="minor">
-            <a:schemeClr val="lt1"/>
-          </a:fontRef>
-        </p:style>
-        <p:txBody>
-          <a:bodyPr rtlCol="0" anchor="ctr"/>
-          <a:lstStyle/>
-          <a:p>
-            <a:pPr algn="ctr"/>
-          </a:p>
-        </p:txBody>
-      </p:sp>
-      <p:sp>
-        <p:nvSpPr>
-          <p:cNvPr id="22" name="Rectangle 21"/>
-          <p:cNvSpPr/>
-          <p:nvPr/>
-        </p:nvSpPr>
-        <p:spPr>
-          <a:xfrm>
-            <a:off x="4860036" y="2221991"/>
-            <a:ext cx="3662172" cy="2510027"/>
-          </a:xfrm>
-          <a:prstGeom prst="rect">
-            <a:avLst/>
-          </a:prstGeom>
-          <a:solidFill>
-            <a:srgbClr val="FFFFFF"/>
-          </a:solidFill>
-          <a:ln w="6350">
-            <a:solidFill>
-              <a:srgbClr val="E2E8F0"/>
-            </a:solidFill>
-          </a:ln>
-          <a:effectLst/>
-        </p:spPr>
-        <p:style>
-          <a:lnRef idx="1">
-            <a:schemeClr val="accent1"/>
-          </a:lnRef>
-          <a:fillRef idx="3">
-            <a:schemeClr val="accent1"/>
-          </a:fillRef>
-          <a:effectRef idx="2">
-            <a:schemeClr val="accent1"/>
-          </a:effectRef>
-          <a:fontRef idx="minor">
-            <a:schemeClr val="lt1"/>
-          </a:fontRef>
-        </p:style>
-        <p:txBody>
-          <a:bodyPr rtlCol="0" anchor="ctr"/>
-          <a:lstStyle/>
-          <a:p>
-            <a:pPr algn="ctr"/>
-          </a:p>
-        </p:txBody>
-      </p:sp>
-      <p:sp>
-        <p:nvSpPr>
-          <p:cNvPr id="23" name="TextBox 22"/>
-          <p:cNvSpPr txBox="1"/>
-          <p:nvPr/>
-        </p:nvSpPr>
-        <p:spPr>
-          <a:xfrm>
-            <a:off x="4914900" y="2240279"/>
-            <a:ext cx="3552444" cy="2473451"/>
-          </a:xfrm>
-          <a:prstGeom prst="rect">
-            <a:avLst/>
-          </a:prstGeom>
-          <a:noFill/>
-        </p:spPr>
-        <p:txBody>
-          <a:bodyPr wrap="square" anchor="t" lIns="54864" rIns="54864" tIns="54864" bIns="54864">
-            <a:spAutoFit/>
-          </a:bodyPr>
-          <a:lstStyle/>
+              <a:t>[სტარტაპის სახელი],</a:t>
+            </a:r>
+          </a:p>
           <a:p>
             <a:pPr>
               <a:spcAft>
@@ -37482,7 +37645,7 @@
                 <a:cs typeface="Consolas"/>
                 <a:latin typeface="Consolas"/>
               </a:rPr>
-              <a:t>Scenario: Landing Page</a:t>
+              <a:t>[1-წინადადებიანი იდეა].</a:t>
             </a:r>
           </a:p>
           <a:p>
@@ -37500,7 +37663,7 @@
                 <a:cs typeface="Consolas"/>
                 <a:latin typeface="Consolas"/>
               </a:rPr>
-              <a:t>Form → Email + CRM Sheets</a:t>
+              <a:t>ჩემი Lean Canvas და</a:t>
             </a:r>
           </a:p>
           <a:p>
@@ -37518,7 +37681,7 @@
                 <a:cs typeface="Consolas"/>
                 <a:latin typeface="Consolas"/>
               </a:rPr>
-              <a:t>1. TRIGGER: Webhook (POST</a:t>
+              <a:t>სამიზნე მომხმარებელია:</a:t>
             </a:r>
           </a:p>
           <a:p>
@@ -37536,7 +37699,7 @@
                 <a:cs typeface="Consolas"/>
                 <a:latin typeface="Consolas"/>
               </a:rPr>
-              <a:t>request)</a:t>
+              <a:t>[მონაცემები].</a:t>
             </a:r>
           </a:p>
           <a:p>
@@ -37554,7 +37717,7 @@
                 <a:cs typeface="Consolas"/>
                 <a:latin typeface="Consolas"/>
               </a:rPr>
-              <a:t>URL: [Lovable-იდან</a:t>
+              <a:t> </a:t>
             </a:r>
           </a:p>
           <a:p>
@@ -37572,7 +37735,7 @@
                 <a:cs typeface="Consolas"/>
                 <a:latin typeface="Consolas"/>
               </a:rPr>
-              <a:t>მიღებული Webhook URL]</a:t>
+              <a:t>შექმენი სრული 10-სლაიდიანი</a:t>
             </a:r>
           </a:p>
           <a:p>
@@ -37590,7 +37753,7 @@
                 <a:cs typeface="Consolas"/>
                 <a:latin typeface="Consolas"/>
               </a:rPr>
-              <a:t>2. MODULE 1: Send Email</a:t>
+              <a:t>Pitch Deck Outline</a:t>
             </a:r>
           </a:p>
           <a:p>
@@ -37608,7 +37771,7 @@
                 <a:cs typeface="Consolas"/>
                 <a:latin typeface="Consolas"/>
               </a:rPr>
-              <a:t>via Gmail</a:t>
+              <a:t>Gamma.app-ისთვის.</a:t>
             </a:r>
           </a:p>
           <a:p>
@@ -37626,7 +37789,7 @@
                 <a:cs typeface="Consolas"/>
                 <a:latin typeface="Consolas"/>
               </a:rPr>
-              <a:t>To: {{trigger.email}}</a:t>
+              <a:t>თითოეული სლაიდისთვის</a:t>
             </a:r>
           </a:p>
           <a:p>
@@ -37644,7 +37807,7 @@
                 <a:cs typeface="Consolas"/>
                 <a:latin typeface="Consolas"/>
               </a:rPr>
-              <a:t>Subject: "გმადლობთ</a:t>
+              <a:t>დაწერე:</a:t>
             </a:r>
           </a:p>
           <a:p>
@@ -37662,7 +37825,7 @@
                 <a:cs typeface="Consolas"/>
                 <a:latin typeface="Consolas"/>
               </a:rPr>
-              <a:t>რეგისტრაციისთვის!"</a:t>
+              <a:t>1. სლაიდის სათაური და</a:t>
             </a:r>
           </a:p>
           <a:p>
@@ -37680,7 +37843,7 @@
                 <a:cs typeface="Consolas"/>
                 <a:latin typeface="Consolas"/>
               </a:rPr>
-              <a:t>Body: "ჩვენი გუნდი მალე</a:t>
+              <a:t>მიზანი</a:t>
             </a:r>
           </a:p>
           <a:p>
@@ -37698,7 +37861,7 @@
                 <a:cs typeface="Consolas"/>
                 <a:latin typeface="Consolas"/>
               </a:rPr>
-              <a:t>დაგიკავშირდებათ."</a:t>
+              <a:t>2. 3 მკაფიო, მოკლე Bullet</a:t>
             </a:r>
           </a:p>
           <a:p>
@@ -37716,7 +37879,7 @@
                 <a:cs typeface="Consolas"/>
                 <a:latin typeface="Consolas"/>
               </a:rPr>
-              <a:t>3. MODULE 2: Add Row to</a:t>
+              <a:t>Point (მაქს 10 სიტყვა)</a:t>
             </a:r>
           </a:p>
           <a:p>
@@ -37734,7 +37897,7 @@
                 <a:cs typeface="Consolas"/>
                 <a:latin typeface="Consolas"/>
               </a:rPr>
-              <a:t>Google Sheets (leads</a:t>
+              <a:t>3. ვიზუალური რეკომენდაცია</a:t>
             </a:r>
           </a:p>
           <a:p>
@@ -37752,7 +37915,7 @@
                 <a:cs typeface="Consolas"/>
                 <a:latin typeface="Consolas"/>
               </a:rPr>
-              <a:t>ცხრილში)</a:t>
+              <a:t>(Card layout / Stats /</a:t>
             </a:r>
           </a:p>
           <a:p>
@@ -37770,7 +37933,7 @@
                 <a:cs typeface="Consolas"/>
                 <a:latin typeface="Consolas"/>
               </a:rPr>
-              <a:t>Columns: Email, Name, Date</a:t>
+              <a:t>Image)</a:t>
             </a:r>
           </a:p>
           <a:p>
@@ -37788,7 +37951,7 @@
                 <a:cs typeface="Consolas"/>
                 <a:latin typeface="Consolas"/>
               </a:rPr>
-              <a:t>4. FILTER: Email is not</a:t>
+              <a:t>მოიცავი: Hook, Problem,</a:t>
             </a:r>
           </a:p>
           <a:p>
@@ -37806,7 +37969,7 @@
                 <a:cs typeface="Consolas"/>
                 <a:latin typeface="Consolas"/>
               </a:rPr>
-              <a:t>empty (ცარიელი მეილები</a:t>
+              <a:t>Solution, Why Now,</a:t>
             </a:r>
           </a:p>
           <a:p>
@@ -37824,14 +37987,68 @@
                 <a:cs typeface="Consolas"/>
                 <a:latin typeface="Consolas"/>
               </a:rPr>
-              <a:t>იფილტრება)</a:t>
-            </a:r>
-          </a:p>
-        </p:txBody>
-      </p:sp>
-      <p:sp>
-        <p:nvSpPr>
-          <p:cNvPr id="24" name="Rectangle 23"/>
+              <a:t>TAM/SAM/SOM, Product Demo,</a:t>
+            </a:r>
+          </a:p>
+          <a:p>
+            <a:pPr>
+              <a:spcAft>
+                <a:spcPts val="0"/>
+              </a:spcAft>
+            </a:pPr>
+            <a:r>
+              <a:rPr sz="1000">
+                <a:solidFill>
+                  <a:srgbClr val="0F172A"/>
+                </a:solidFill>
+                <a:ea typeface="Consolas"/>
+                <a:cs typeface="Consolas"/>
+                <a:latin typeface="Consolas"/>
+              </a:rPr>
+              <a:t>Business Model,</a:t>
+            </a:r>
+          </a:p>
+          <a:p>
+            <a:pPr>
+              <a:spcAft>
+                <a:spcPts val="0"/>
+              </a:spcAft>
+            </a:pPr>
+            <a:r>
+              <a:rPr sz="1000">
+                <a:solidFill>
+                  <a:srgbClr val="0F172A"/>
+                </a:solidFill>
+                <a:ea typeface="Consolas"/>
+                <a:cs typeface="Consolas"/>
+                <a:latin typeface="Consolas"/>
+              </a:rPr>
+              <a:t>Competition, Team, Ask</a:t>
+            </a:r>
+          </a:p>
+          <a:p>
+            <a:pPr>
+              <a:spcAft>
+                <a:spcPts val="0"/>
+              </a:spcAft>
+            </a:pPr>
+            <a:r>
+              <a:rPr sz="1000">
+                <a:solidFill>
+                  <a:srgbClr val="0F172A"/>
+                </a:solidFill>
+                <a:ea typeface="Consolas"/>
+                <a:cs typeface="Consolas"/>
+                <a:latin typeface="Consolas"/>
+              </a:rPr>
+              <a:t>(25,000₾ GITA).</a:t>
+            </a:r>
+          </a:p>
+        </p:txBody>
+      </p:sp>
+      <p:sp>
+        <p:nvSpPr>
+          <p:cNvPr id="22" name="Rectangle 21"/>
           <p:cNvSpPr/>
           <p:nvPr/>
         </p:nvSpPr>
@@ -37875,7 +38092,7 @@
       </p:sp>
       <p:sp>
         <p:nvSpPr>
-          <p:cNvPr id="25" name="TextBox 24"/>
+          <p:cNvPr id="23" name="TextBox 22"/>
           <p:cNvSpPr txBox="1"/>
           <p:nvPr/>
         </p:nvSpPr>
@@ -38095,7 +38312,7 @@
                 <a:cs typeface="Sylfaen"/>
                 <a:latin typeface="Sylfaen"/>
               </a:rPr>
-              <a:t>CRM Scenario: Appending Lead Row in Sheets</a:t>
+              <a:t>ბაზრის ზომა (TAM, SAM, SOM) და Unit Economics AI-ით</a:t>
             </a:r>
           </a:p>
         </p:txBody>
@@ -38237,7 +38454,7 @@
                 <a:cs typeface="Sylfaen"/>
                 <a:latin typeface="Sylfaen"/>
               </a:rPr>
-              <a:t>მონაცემთა ბაზიდან Leads-ის გადატანა Google Sheets CRM-ში:</a:t>
+              <a:t>როგორ ვითვლით ბაზრის ზომას Perplexity-ით და ვაფასებთ ეკონომიკას:</a:t>
             </a:r>
           </a:p>
         </p:txBody>
@@ -38251,7 +38468,7 @@
         <p:spPr>
           <a:xfrm>
             <a:off x="457200" y="1737360"/>
-            <a:ext cx="54864" cy="2313432"/>
+            <a:ext cx="54864" cy="3113532"/>
           </a:xfrm>
           <a:prstGeom prst="rect">
             <a:avLst/>
@@ -38295,7 +38512,7 @@
         <p:spPr>
           <a:xfrm>
             <a:off x="512064" y="1737360"/>
-            <a:ext cx="8174736" cy="2313432"/>
+            <a:ext cx="3991356" cy="3113532"/>
           </a:xfrm>
           <a:prstGeom prst="roundRect">
             <a:avLst>
@@ -38303,11 +38520,11 @@
             </a:avLst>
           </a:prstGeom>
           <a:solidFill>
-            <a:srgbClr val="EEF2FF"/>
-          </a:solidFill>
-          <a:ln w="9525">
+            <a:srgbClr val="F8FAFC"/>
+          </a:solidFill>
+          <a:ln w="6350">
             <a:solidFill>
-              <a:srgbClr val="3730A3"/>
+              <a:srgbClr val="E2E8F0"/>
             </a:solidFill>
           </a:ln>
           <a:effectLst/>
@@ -38343,7 +38560,7 @@
         <p:spPr>
           <a:xfrm>
             <a:off x="621792" y="1810512"/>
-            <a:ext cx="7955279" cy="320040"/>
+            <a:ext cx="3771900" cy="320040"/>
           </a:xfrm>
           <a:prstGeom prst="rect">
             <a:avLst/>
@@ -38370,7 +38587,7 @@
                 <a:cs typeface="Sylfaen"/>
                 <a:latin typeface="Sylfaen"/>
               </a:rPr>
-              <a:t>Google Sheets მოდულის კონფიგურაცია:</a:t>
+              <a:t>📊 ბაზრის 3 დონე:</a:t>
             </a:r>
           </a:p>
         </p:txBody>
@@ -38384,7 +38601,7 @@
         <p:spPr>
           <a:xfrm>
             <a:off x="621792" y="2203704"/>
-            <a:ext cx="7955279" cy="1719072"/>
+            <a:ext cx="3771900" cy="2574035"/>
           </a:xfrm>
           <a:prstGeom prst="rect">
             <a:avLst/>
@@ -38422,7 +38639,7 @@
                 <a:cs typeface="Sylfaen"/>
                 <a:latin typeface="Sylfaen"/>
               </a:rPr>
-              <a:t>დააკავშირეთ თქვენი Google Drive ანგარიში Make-თან;</a:t>
+              <a:t>TAM (Total Addressable Market): გლობალური ან რეგიონული მთლიანი ბაზარი (მაგ: $2B აგრო-ლოგისტიკა).</a:t>
             </a:r>
           </a:p>
           <a:p>
@@ -38451,7 +38668,7 @@
                 <a:cs typeface="Sylfaen"/>
                 <a:latin typeface="Sylfaen"/>
               </a:rPr>
-              <a:t>აირჩიეთ ფაილი „Leads CRM“;</a:t>
+              <a:t>SAM (Serviceable Available Market): ბაზარი, რომელზეც რეალურად მიგვიწვდება ხელი (მაგ: $50M სამხრეთ კავკასიაში).</a:t>
             </a:r>
           </a:p>
           <a:p>
@@ -38480,7 +38697,7 @@
                 <a:cs typeface="Sylfaen"/>
                 <a:latin typeface="Sylfaen"/>
               </a:rPr>
-              <a:t>სვეტებში (A, B, C) მიაბით Webhook-იდან მიღებული ცვლადები: A = Name , B = Email , C = Created_at .</a:t>
+              <a:t>SOM (Serviceable Obtainable Market): ჩვენი სამიზნე პირველ 1-2 წელიწადში (მაგ: $500K, 200 ფერმერი).</a:t>
             </a:r>
           </a:p>
         </p:txBody>
@@ -38488,6 +38705,180 @@
       <p:sp>
         <p:nvSpPr>
           <p:cNvPr id="13" name="Rectangle 12"/>
+          <p:cNvSpPr/>
+          <p:nvPr/>
+        </p:nvSpPr>
+        <p:spPr>
+          <a:xfrm>
+            <a:off x="4640580" y="1737360"/>
+            <a:ext cx="54864" cy="3113532"/>
+          </a:xfrm>
+          <a:prstGeom prst="rect">
+            <a:avLst/>
+          </a:prstGeom>
+          <a:solidFill>
+            <a:srgbClr val="3730A3"/>
+          </a:solidFill>
+          <a:ln>
+            <a:noFill/>
+          </a:ln>
+          <a:effectLst/>
+        </p:spPr>
+        <p:style>
+          <a:lnRef idx="1">
+            <a:schemeClr val="accent1"/>
+          </a:lnRef>
+          <a:fillRef idx="3">
+            <a:schemeClr val="accent1"/>
+          </a:fillRef>
+          <a:effectRef idx="2">
+            <a:schemeClr val="accent1"/>
+          </a:effectRef>
+          <a:fontRef idx="minor">
+            <a:schemeClr val="lt1"/>
+          </a:fontRef>
+        </p:style>
+        <p:txBody>
+          <a:bodyPr rtlCol="0" anchor="ctr"/>
+          <a:lstStyle/>
+          <a:p>
+            <a:pPr algn="ctr"/>
+          </a:p>
+        </p:txBody>
+      </p:sp>
+      <p:sp>
+        <p:nvSpPr>
+          <p:cNvPr id="14" name="Rounded Rectangle 13"/>
+          <p:cNvSpPr/>
+          <p:nvPr/>
+        </p:nvSpPr>
+        <p:spPr>
+          <a:xfrm>
+            <a:off x="4695444" y="1737360"/>
+            <a:ext cx="3991356" cy="3113532"/>
+          </a:xfrm>
+          <a:prstGeom prst="roundRect">
+            <a:avLst>
+              <a:gd name="adj" fmla="val 4000"/>
+            </a:avLst>
+          </a:prstGeom>
+          <a:solidFill>
+            <a:srgbClr val="F8FAFC"/>
+          </a:solidFill>
+          <a:ln w="6350">
+            <a:solidFill>
+              <a:srgbClr val="E2E8F0"/>
+            </a:solidFill>
+          </a:ln>
+          <a:effectLst/>
+        </p:spPr>
+        <p:style>
+          <a:lnRef idx="1">
+            <a:schemeClr val="accent1"/>
+          </a:lnRef>
+          <a:fillRef idx="3">
+            <a:schemeClr val="accent1"/>
+          </a:fillRef>
+          <a:effectRef idx="2">
+            <a:schemeClr val="accent1"/>
+          </a:effectRef>
+          <a:fontRef idx="minor">
+            <a:schemeClr val="lt1"/>
+          </a:fontRef>
+        </p:style>
+        <p:txBody>
+          <a:bodyPr rtlCol="0" anchor="ctr"/>
+          <a:lstStyle/>
+          <a:p>
+            <a:pPr algn="ctr"/>
+          </a:p>
+        </p:txBody>
+      </p:sp>
+      <p:sp>
+        <p:nvSpPr>
+          <p:cNvPr id="15" name="TextBox 14"/>
+          <p:cNvSpPr txBox="1"/>
+          <p:nvPr/>
+        </p:nvSpPr>
+        <p:spPr>
+          <a:xfrm>
+            <a:off x="4805172" y="1810512"/>
+            <a:ext cx="3771900" cy="320040"/>
+          </a:xfrm>
+          <a:prstGeom prst="rect">
+            <a:avLst/>
+          </a:prstGeom>
+          <a:noFill/>
+        </p:spPr>
+        <p:txBody>
+          <a:bodyPr wrap="square" anchor="t" lIns="54864" rIns="54864" tIns="54864" bIns="54864">
+            <a:spAutoFit/>
+          </a:bodyPr>
+          <a:lstStyle/>
+          <a:p>
+            <a:pPr>
+              <a:spcAft>
+                <a:spcPts val="400"/>
+              </a:spcAft>
+            </a:pPr>
+            <a:r>
+              <a:rPr sz="1400" b="1" i="0">
+                <a:solidFill>
+                  <a:srgbClr val="0F172A"/>
+                </a:solidFill>
+                <a:ea typeface="Sylfaen"/>
+                <a:cs typeface="Sylfaen"/>
+                <a:latin typeface="Sylfaen"/>
+              </a:rPr>
+              <a:t>💰 Unit Economics ოქროს წესი:</a:t>
+            </a:r>
+          </a:p>
+        </p:txBody>
+      </p:sp>
+      <p:sp>
+        <p:nvSpPr>
+          <p:cNvPr id="16" name="TextBox 15"/>
+          <p:cNvSpPr txBox="1"/>
+          <p:nvPr/>
+        </p:nvSpPr>
+        <p:spPr>
+          <a:xfrm>
+            <a:off x="4805172" y="2203704"/>
+            <a:ext cx="3771900" cy="713232"/>
+          </a:xfrm>
+          <a:prstGeom prst="rect">
+            <a:avLst/>
+          </a:prstGeom>
+          <a:noFill/>
+        </p:spPr>
+        <p:txBody>
+          <a:bodyPr wrap="square" anchor="t" lIns="54864" rIns="54864" tIns="54864" bIns="54864">
+            <a:spAutoFit/>
+          </a:bodyPr>
+          <a:lstStyle/>
+          <a:p>
+            <a:pPr>
+              <a:spcAft>
+                <a:spcPts val="400"/>
+              </a:spcAft>
+            </a:pPr>
+            <a:r>
+              <a:rPr sz="1300" b="0" i="0">
+                <a:solidFill>
+                  <a:srgbClr val="0F172A"/>
+                </a:solidFill>
+                <a:ea typeface="Sylfaen"/>
+                <a:cs typeface="Sylfaen"/>
+                <a:latin typeface="Sylfaen"/>
+              </a:rPr>
+              <a:t>LTV &gt; 3 × CAC თუ კლიენტის მოზიდვა (CAC) ჯდება $10, მისგან მიღებული მოგება (LTV) მინიმუმ $30 უნდა იყოს. AI დაგეხმარებათ ამ ციფრების ლოგიკურ მოდელირებაში.</a:t>
+            </a:r>
+          </a:p>
+        </p:txBody>
+      </p:sp>
+      <p:sp>
+        <p:nvSpPr>
+          <p:cNvPr id="17" name="Rectangle 16"/>
           <p:cNvSpPr/>
           <p:nvPr/>
         </p:nvSpPr>
@@ -38531,7 +38922,7 @@
       </p:sp>
       <p:sp>
         <p:nvSpPr>
-          <p:cNvPr id="14" name="TextBox 13"/>
+          <p:cNvPr id="18" name="TextBox 17"/>
           <p:cNvSpPr txBox="1"/>
           <p:nvPr/>
         </p:nvSpPr>
@@ -38751,7 +39142,7 @@
                 <a:cs typeface="Sylfaen"/>
                 <a:latin typeface="Sylfaen"/>
               </a:rPr>
-              <a:t>CRM Scenario: Gmail SMTP Connection</a:t>
+              <a:t>Pitch Delivery: 3-წუთიანი ტაიმინგი, რიტმი და სხეულის ენა</a:t>
             </a:r>
           </a:p>
         </p:txBody>
@@ -38893,7 +39284,7 @@
                 <a:cs typeface="Sylfaen"/>
                 <a:latin typeface="Sylfaen"/>
               </a:rPr>
-              <a:t>ავტომატური იმეილის გაგზავნა დარეგისტრირებულ მომხმარებელთან:</a:t>
+              <a:t>როგორ წარვადგინოთ პრეზენტაცია უმაღლეს დონეზე:</a:t>
             </a:r>
           </a:p>
         </p:txBody>
@@ -39026,7 +39417,7 @@
                 <a:cs typeface="Sylfaen"/>
                 <a:latin typeface="Sylfaen"/>
               </a:rPr>
-              <a:t>Gmail მოდულის პარამეტრები:</a:t>
+              <a:t>🎯 3 ოქროს წესი:</a:t>
             </a:r>
           </a:p>
         </p:txBody>
@@ -39040,7 +39431,7 @@
         <p:spPr>
           <a:xfrm>
             <a:off x="621792" y="2203704"/>
-            <a:ext cx="3771900" cy="2267712"/>
+            <a:ext cx="3771900" cy="2542032"/>
           </a:xfrm>
           <a:prstGeom prst="rect">
             <a:avLst/>
@@ -39078,7 +39469,7 @@
                 <a:cs typeface="Sylfaen"/>
                 <a:latin typeface="Sylfaen"/>
               </a:rPr>
-              <a:t>To: Webhook-იდან მიღებული Email ცვლადი;</a:t>
+              <a:t>18-20 წამი თითო სლაიდზე: დროის გადაცილებისას ჟიური გაგაჩერებთ;</a:t>
             </a:r>
           </a:p>
           <a:p>
@@ -39107,7 +39498,7 @@
                 <a:cs typeface="Sylfaen"/>
                 <a:latin typeface="Sylfaen"/>
               </a:rPr>
-              <a:t>Subject: „გმადლობთ რეგისტრაციისთვის [სტარტაპის სახელი]-ზე!“;</a:t>
+              <a:t>არასოდეს წაიკითხოთ სლაიდიდან: სლაიდზე მხოლოდ ფაქტებია, ისტორიას თქვენ ჰყვებით;</a:t>
             </a:r>
           </a:p>
           <a:p>
@@ -39136,7 +39527,7 @@
                 <a:cs typeface="Sylfaen"/>
                 <a:latin typeface="Sylfaen"/>
               </a:rPr>
-              <a:t>Body: პერსონალიზებული ტექსტი, სადაც გამოიყენებთ Name ცვლადს.</a:t>
+              <a:t>თვალით კონტაქტი: უყურეთ ჟიურის თითოეულ წევრს, არა პროექტორს ან იატაკს.</a:t>
             </a:r>
           </a:p>
         </p:txBody>
@@ -39156,7 +39547,7 @@
             <a:avLst/>
           </a:prstGeom>
           <a:solidFill>
-            <a:srgbClr val="3730A3"/>
+            <a:srgbClr val="4F46E5"/>
           </a:solidFill>
           <a:ln>
             <a:noFill/>
@@ -39202,11 +39593,11 @@
             </a:avLst>
           </a:prstGeom>
           <a:solidFill>
-            <a:srgbClr val="EEF2FF"/>
+            <a:srgbClr val="FFF7ED"/>
           </a:solidFill>
           <a:ln w="6350">
             <a:solidFill>
-              <a:srgbClr val="3730A3"/>
+              <a:srgbClr val="4F46E5"/>
             </a:solidFill>
           </a:ln>
           <a:effectLst/>
@@ -39269,7 +39660,7 @@
                 <a:cs typeface="Sylfaen"/>
                 <a:latin typeface="Sylfaen"/>
               </a:rPr>
-              <a:t>🔒 SMTP უსაფრთხოება:</a:t>
+              <a:t>⚠️ 3 საბედისწერო შეცდომა:</a:t>
             </a:r>
           </a:p>
         </p:txBody>
@@ -39283,7 +39674,7 @@
         <p:spPr>
           <a:xfrm>
             <a:off x="4805172" y="2203704"/>
-            <a:ext cx="3771900" cy="713232"/>
+            <a:ext cx="3771900" cy="1993392"/>
           </a:xfrm>
           <a:prstGeom prst="rect">
             <a:avLst/>
@@ -39296,13 +39687,24 @@
           </a:bodyPr>
           <a:lstStyle/>
           <a:p>
-            <a:pPr>
-              <a:spcAft>
-                <a:spcPts val="400"/>
-              </a:spcAft>
-            </a:pPr>
-            <a:r>
-              <a:rPr sz="1300" b="0" i="0">
+            <a:pPr algn="l">
+              <a:spcAft>
+                <a:spcPts val="300"/>
+              </a:spcAft>
+            </a:pPr>
+            <a:r>
+              <a:rPr sz="1300" b="1">
+                <a:solidFill>
+                  <a:srgbClr val="3730A3"/>
+                </a:solidFill>
+                <a:ea typeface="Sylfaen"/>
+                <a:cs typeface="Sylfaen"/>
+                <a:latin typeface="Sylfaen"/>
+              </a:rPr>
+              <a:t>▸  </a:t>
+            </a:r>
+            <a:r>
+              <a:rPr sz="1300">
                 <a:solidFill>
                   <a:srgbClr val="0F172A"/>
                 </a:solidFill>
@@ -39310,7 +39712,65 @@
                 <a:cs typeface="Sylfaen"/>
                 <a:latin typeface="Sylfaen"/>
               </a:rPr>
-              <a:t>Gmail-თან დასაკავშირებლად დაგჭირდებათ Google-ის უსაფრთხოების მენიუდან "App Password"-ის გენერირება.</a:t>
+              <a:t>დაბალი ენერგია და მონოტონური ხმა;</a:t>
+            </a:r>
+          </a:p>
+          <a:p>
+            <a:pPr algn="l">
+              <a:spcAft>
+                <a:spcPts val="300"/>
+              </a:spcAft>
+            </a:pPr>
+            <a:r>
+              <a:rPr sz="1300" b="1">
+                <a:solidFill>
+                  <a:srgbClr val="3730A3"/>
+                </a:solidFill>
+                <a:ea typeface="Sylfaen"/>
+                <a:cs typeface="Sylfaen"/>
+                <a:latin typeface="Sylfaen"/>
+              </a:rPr>
+              <a:t>▸  </a:t>
+            </a:r>
+            <a:r>
+              <a:rPr sz="1300">
+                <a:solidFill>
+                  <a:srgbClr val="0F172A"/>
+                </a:solidFill>
+                <a:ea typeface="Sylfaen"/>
+                <a:cs typeface="Sylfaen"/>
+                <a:latin typeface="Sylfaen"/>
+              </a:rPr>
+              <a:t>ტექნიკურ დეტალებში ჩაკარგვა პრობლემის ახსნის ნაცვლად;</a:t>
+            </a:r>
+          </a:p>
+          <a:p>
+            <a:pPr algn="l">
+              <a:spcAft>
+                <a:spcPts val="300"/>
+              </a:spcAft>
+            </a:pPr>
+            <a:r>
+              <a:rPr sz="1300" b="1">
+                <a:solidFill>
+                  <a:srgbClr val="3730A3"/>
+                </a:solidFill>
+                <a:ea typeface="Sylfaen"/>
+                <a:cs typeface="Sylfaen"/>
+                <a:latin typeface="Sylfaen"/>
+              </a:rPr>
+              <a:t>▸  </a:t>
+            </a:r>
+            <a:r>
+              <a:rPr sz="1300">
+                <a:solidFill>
+                  <a:srgbClr val="0F172A"/>
+                </a:solidFill>
+                <a:ea typeface="Sylfaen"/>
+                <a:cs typeface="Sylfaen"/>
+                <a:latin typeface="Sylfaen"/>
+              </a:rPr>
+              <a:t>ბუნდოვანი The Ask — ზუსტად უნდა თქვათ, რაში გჭირდებათ 25,000 ლარი.</a:t>
             </a:r>
           </a:p>
         </p:txBody>
@@ -39581,7 +40041,7 @@
                 <a:cs typeface="Sylfaen"/>
                 <a:latin typeface="Sylfaen"/>
               </a:rPr>
-              <a:t>Make.com: შეცდომების მართვა და Edge Cases</a:t>
+              <a:t>AI Pitch Coach &amp; Script Polishing: Claude-ით სასაუბრო სკრიპტი</a:t>
             </a:r>
           </a:p>
         </p:txBody>
@@ -39696,7 +40156,7 @@
         <p:spPr>
           <a:xfrm>
             <a:off x="457200" y="1188720"/>
-            <a:ext cx="8229600" cy="713232"/>
+            <a:ext cx="8229600" cy="475488"/>
           </a:xfrm>
           <a:prstGeom prst="rect">
             <a:avLst/>
@@ -39723,7 +40183,7 @@
                 <a:cs typeface="Sylfaen"/>
                 <a:latin typeface="Sylfaen"/>
               </a:rPr>
-              <a:t>როგორ უზრუნველვყოთ ჩვენი ავტომატიზაციების სტაბილური მუშაობა შეცდომების შემთხვევაში?</a:t>
+              <a:t>სასაუბრო სკრიპტის მომზადება და რეპეტიცია AI მენტორთან:</a:t>
             </a:r>
           </a:p>
         </p:txBody>
@@ -39736,14 +40196,14 @@
         </p:nvSpPr>
         <p:spPr>
           <a:xfrm>
-            <a:off x="457200" y="1975104"/>
-            <a:ext cx="54864" cy="2875788"/>
-          </a:xfrm>
-          <a:prstGeom prst="rect">
-            <a:avLst/>
-          </a:prstGeom>
-          <a:solidFill>
-            <a:srgbClr val="4F46E5"/>
+            <a:off x="457200" y="1737360"/>
+            <a:ext cx="54864" cy="3113532"/>
+          </a:xfrm>
+          <a:prstGeom prst="rect">
+            <a:avLst/>
+          </a:prstGeom>
+          <a:solidFill>
+            <a:srgbClr val="3730A3"/>
           </a:solidFill>
           <a:ln>
             <a:noFill/>
@@ -39780,8 +40240,8 @@
         </p:nvSpPr>
         <p:spPr>
           <a:xfrm>
-            <a:off x="512064" y="1975104"/>
-            <a:ext cx="3991356" cy="2875788"/>
+            <a:off x="512064" y="1737360"/>
+            <a:ext cx="3991356" cy="3113532"/>
           </a:xfrm>
           <a:prstGeom prst="roundRect">
             <a:avLst>
@@ -39789,11 +40249,11 @@
             </a:avLst>
           </a:prstGeom>
           <a:solidFill>
-            <a:srgbClr val="FFF7ED"/>
+            <a:srgbClr val="F8FAFC"/>
           </a:solidFill>
           <a:ln w="6350">
             <a:solidFill>
-              <a:srgbClr val="4F46E5"/>
+              <a:srgbClr val="E2E8F0"/>
             </a:solidFill>
           </a:ln>
           <a:effectLst/>
@@ -39828,7 +40288,7 @@
         </p:nvSpPr>
         <p:spPr>
           <a:xfrm>
-            <a:off x="621792" y="2048256"/>
+            <a:off x="621792" y="1810512"/>
             <a:ext cx="3771900" cy="320040"/>
           </a:xfrm>
           <a:prstGeom prst="rect">
@@ -39856,7 +40316,7 @@
                 <a:cs typeface="Sylfaen"/>
                 <a:latin typeface="Sylfaen"/>
               </a:rPr>
-              <a:t>⚠️ პოტენციური შეცდომები:</a:t>
+              <a:t>🎤 სკრიპტის სტრუქტურა (3 წუთი):</a:t>
             </a:r>
           </a:p>
         </p:txBody>
@@ -39869,8 +40329,8 @@
         </p:nvSpPr>
         <p:spPr>
           <a:xfrm>
-            <a:off x="621792" y="2441448"/>
-            <a:ext cx="3771900" cy="1719072"/>
+            <a:off x="621792" y="2203704"/>
+            <a:ext cx="3771900" cy="2574035"/>
           </a:xfrm>
           <a:prstGeom prst="rect">
             <a:avLst/>
@@ -39908,7 +40368,7 @@
                 <a:cs typeface="Sylfaen"/>
                 <a:latin typeface="Sylfaen"/>
               </a:rPr>
-              <a:t>მომხმარებელმა ფორმაში არ შეიყვანა სახელი (ცარიელი ველი);</a:t>
+              <a:t>0:00 - 0:45: Hook + Problem (ტკივილი და მაგალითი)</a:t>
             </a:r>
           </a:p>
           <a:p>
@@ -39937,7 +40397,7 @@
                 <a:cs typeface="Sylfaen"/>
                 <a:latin typeface="Sylfaen"/>
               </a:rPr>
-              <a:t>ელფოსტის ფორმატი არასწორია;</a:t>
+              <a:t>0:45 - 1:30: Solution + Live MVP Demo</a:t>
             </a:r>
           </a:p>
           <a:p>
@@ -39966,7 +40426,36 @@
                 <a:cs typeface="Sylfaen"/>
                 <a:latin typeface="Sylfaen"/>
               </a:rPr>
-              <a:t>სერვერი დროებით გაითიშა.</a:t>
+              <a:t>1:30 - 2:15: Market, Business Model &amp; Competition</a:t>
+            </a:r>
+          </a:p>
+          <a:p>
+            <a:pPr algn="l">
+              <a:spcAft>
+                <a:spcPts val="300"/>
+              </a:spcAft>
+            </a:pPr>
+            <a:r>
+              <a:rPr sz="1300" b="1">
+                <a:solidFill>
+                  <a:srgbClr val="3730A3"/>
+                </a:solidFill>
+                <a:ea typeface="Sylfaen"/>
+                <a:cs typeface="Sylfaen"/>
+                <a:latin typeface="Sylfaen"/>
+              </a:rPr>
+              <a:t>▸  </a:t>
+            </a:r>
+            <a:r>
+              <a:rPr sz="1300">
+                <a:solidFill>
+                  <a:srgbClr val="0F172A"/>
+                </a:solidFill>
+                <a:ea typeface="Sylfaen"/>
+                <a:cs typeface="Sylfaen"/>
+                <a:latin typeface="Sylfaen"/>
+              </a:rPr>
+              <a:t>2:15 - 3:00: Team, Traction &amp; The Ask (25,000₾)</a:t>
             </a:r>
           </a:p>
         </p:txBody>
@@ -39979,8 +40468,8 @@
         </p:nvSpPr>
         <p:spPr>
           <a:xfrm>
-            <a:off x="4640580" y="1975104"/>
-            <a:ext cx="54864" cy="2875788"/>
+            <a:off x="4640580" y="1737360"/>
+            <a:ext cx="54864" cy="3113532"/>
           </a:xfrm>
           <a:prstGeom prst="rect">
             <a:avLst/>
@@ -40023,8 +40512,8 @@
         </p:nvSpPr>
         <p:spPr>
           <a:xfrm>
-            <a:off x="4695444" y="1975104"/>
-            <a:ext cx="3991356" cy="2875788"/>
+            <a:off x="4695444" y="1737360"/>
+            <a:ext cx="3991356" cy="3113532"/>
           </a:xfrm>
           <a:prstGeom prst="roundRect">
             <a:avLst>
@@ -40036,6 +40525,98 @@
           </a:solidFill>
           <a:ln w="6350">
             <a:solidFill>
+              <a:srgbClr val="3730A3"/>
+            </a:solidFill>
+          </a:ln>
+          <a:effectLst/>
+        </p:spPr>
+        <p:style>
+          <a:lnRef idx="1">
+            <a:schemeClr val="accent1"/>
+          </a:lnRef>
+          <a:fillRef idx="3">
+            <a:schemeClr val="accent1"/>
+          </a:fillRef>
+          <a:effectRef idx="2">
+            <a:schemeClr val="accent1"/>
+          </a:effectRef>
+          <a:fontRef idx="minor">
+            <a:schemeClr val="lt1"/>
+          </a:fontRef>
+        </p:style>
+        <p:txBody>
+          <a:bodyPr rtlCol="0" anchor="ctr"/>
+          <a:lstStyle/>
+          <a:p>
+            <a:pPr algn="ctr"/>
+          </a:p>
+        </p:txBody>
+      </p:sp>
+      <p:sp>
+        <p:nvSpPr>
+          <p:cNvPr id="15" name="Rectangle 14"/>
+          <p:cNvSpPr/>
+          <p:nvPr/>
+        </p:nvSpPr>
+        <p:spPr>
+          <a:xfrm>
+            <a:off x="4805172" y="1810512"/>
+            <a:ext cx="54864" cy="292608"/>
+          </a:xfrm>
+          <a:prstGeom prst="rect">
+            <a:avLst/>
+          </a:prstGeom>
+          <a:solidFill>
+            <a:srgbClr val="3730A3"/>
+          </a:solidFill>
+          <a:ln>
+            <a:noFill/>
+          </a:ln>
+          <a:effectLst/>
+        </p:spPr>
+        <p:style>
+          <a:lnRef idx="1">
+            <a:schemeClr val="accent1"/>
+          </a:lnRef>
+          <a:fillRef idx="3">
+            <a:schemeClr val="accent1"/>
+          </a:fillRef>
+          <a:effectRef idx="2">
+            <a:schemeClr val="accent1"/>
+          </a:effectRef>
+          <a:fontRef idx="minor">
+            <a:schemeClr val="lt1"/>
+          </a:fontRef>
+        </p:style>
+        <p:txBody>
+          <a:bodyPr rtlCol="0" anchor="ctr"/>
+          <a:lstStyle/>
+          <a:p>
+            <a:pPr algn="ctr"/>
+          </a:p>
+        </p:txBody>
+      </p:sp>
+      <p:sp>
+        <p:nvSpPr>
+          <p:cNvPr id="16" name="Rounded Rectangle 15"/>
+          <p:cNvSpPr/>
+          <p:nvPr/>
+        </p:nvSpPr>
+        <p:spPr>
+          <a:xfrm>
+            <a:off x="4860036" y="1810512"/>
+            <a:ext cx="3717036" cy="292608"/>
+          </a:xfrm>
+          <a:prstGeom prst="roundRect">
+            <a:avLst>
+              <a:gd name="adj" fmla="val 4000"/>
+            </a:avLst>
+          </a:prstGeom>
+          <a:solidFill>
+            <a:srgbClr val="F8FAFC"/>
+          </a:solidFill>
+          <a:ln w="9525">
+            <a:solidFill>
               <a:srgbClr val="E2E8F0"/>
             </a:solidFill>
           </a:ln>
@@ -40065,14 +40646,60 @@
       </p:sp>
       <p:sp>
         <p:nvSpPr>
-          <p:cNvPr id="15" name="TextBox 14"/>
+          <p:cNvPr id="17" name="Rectangle 16"/>
+          <p:cNvSpPr/>
+          <p:nvPr/>
+        </p:nvSpPr>
+        <p:spPr>
+          <a:xfrm>
+            <a:off x="4914900" y="1865376"/>
+            <a:ext cx="3552444" cy="201168"/>
+          </a:xfrm>
+          <a:prstGeom prst="rect">
+            <a:avLst/>
+          </a:prstGeom>
+          <a:solidFill>
+            <a:srgbClr val="FFFFFF"/>
+          </a:solidFill>
+          <a:ln w="6350">
+            <a:solidFill>
+              <a:srgbClr val="E2E8F0"/>
+            </a:solidFill>
+          </a:ln>
+          <a:effectLst/>
+        </p:spPr>
+        <p:style>
+          <a:lnRef idx="1">
+            <a:schemeClr val="accent1"/>
+          </a:lnRef>
+          <a:fillRef idx="3">
+            <a:schemeClr val="accent1"/>
+          </a:fillRef>
+          <a:effectRef idx="2">
+            <a:schemeClr val="accent1"/>
+          </a:effectRef>
+          <a:fontRef idx="minor">
+            <a:schemeClr val="lt1"/>
+          </a:fontRef>
+        </p:style>
+        <p:txBody>
+          <a:bodyPr rtlCol="0" anchor="ctr"/>
+          <a:lstStyle/>
+          <a:p>
+            <a:pPr algn="ctr"/>
+          </a:p>
+        </p:txBody>
+      </p:sp>
+      <p:sp>
+        <p:nvSpPr>
+          <p:cNvPr id="18" name="TextBox 17"/>
           <p:cNvSpPr txBox="1"/>
           <p:nvPr/>
         </p:nvSpPr>
         <p:spPr>
           <a:xfrm>
-            <a:off x="4805172" y="2048256"/>
-            <a:ext cx="3771900" cy="320040"/>
+            <a:off x="4969764" y="1892807"/>
+            <a:ext cx="3442716" cy="146304"/>
           </a:xfrm>
           <a:prstGeom prst="rect">
             <a:avLst/>
@@ -40087,33 +40714,145 @@
           <a:p>
             <a:pPr>
               <a:spcAft>
-                <a:spcPts val="400"/>
-              </a:spcAft>
-            </a:pPr>
-            <a:r>
-              <a:rPr sz="1400" b="1" i="0">
+                <a:spcPts val="0"/>
+              </a:spcAft>
+            </a:pPr>
+            <a:r>
+              <a:rPr sz="800">
                 <a:solidFill>
                   <a:srgbClr val="0F172A"/>
                 </a:solidFill>
-                <a:ea typeface="Sylfaen"/>
-                <a:cs typeface="Sylfaen"/>
-                <a:latin typeface="Sylfaen"/>
-              </a:rPr>
-              <a:t>⚙️ გადაჭრის გზები:</a:t>
-            </a:r>
-          </a:p>
-        </p:txBody>
-      </p:sp>
-      <p:sp>
-        <p:nvSpPr>
-          <p:cNvPr id="16" name="TextBox 15"/>
+                <a:ea typeface="Consolas"/>
+                <a:cs typeface="Consolas"/>
+                <a:latin typeface="Consolas"/>
+              </a:rPr>
+              <a:t>3-Minute Spoken Script</a:t>
+            </a:r>
+          </a:p>
+          <a:p>
+            <a:pPr>
+              <a:spcAft>
+                <a:spcPts val="0"/>
+              </a:spcAft>
+            </a:pPr>
+            <a:r>
+              <a:rPr sz="800">
+                <a:solidFill>
+                  <a:srgbClr val="0F172A"/>
+                </a:solidFill>
+                <a:ea typeface="Consolas"/>
+                <a:cs typeface="Consolas"/>
+                <a:latin typeface="Consolas"/>
+              </a:rPr>
+              <a:t>Prompt (Claude):</a:t>
+            </a:r>
+          </a:p>
+        </p:txBody>
+      </p:sp>
+      <p:sp>
+        <p:nvSpPr>
+          <p:cNvPr id="19" name="Rounded Rectangle 18"/>
+          <p:cNvSpPr/>
+          <p:nvPr/>
+        </p:nvSpPr>
+        <p:spPr>
+          <a:xfrm>
+            <a:off x="4805172" y="2176272"/>
+            <a:ext cx="3771900" cy="2601468"/>
+          </a:xfrm>
+          <a:prstGeom prst="roundRect">
+            <a:avLst>
+              <a:gd name="adj" fmla="val 4000"/>
+            </a:avLst>
+          </a:prstGeom>
+          <a:solidFill>
+            <a:srgbClr val="F8FAFC"/>
+          </a:solidFill>
+          <a:ln w="9525">
+            <a:solidFill>
+              <a:srgbClr val="E2E8F0"/>
+            </a:solidFill>
+          </a:ln>
+          <a:effectLst/>
+        </p:spPr>
+        <p:style>
+          <a:lnRef idx="1">
+            <a:schemeClr val="accent1"/>
+          </a:lnRef>
+          <a:fillRef idx="3">
+            <a:schemeClr val="accent1"/>
+          </a:fillRef>
+          <a:effectRef idx="2">
+            <a:schemeClr val="accent1"/>
+          </a:effectRef>
+          <a:fontRef idx="minor">
+            <a:schemeClr val="lt1"/>
+          </a:fontRef>
+        </p:style>
+        <p:txBody>
+          <a:bodyPr rtlCol="0" anchor="ctr"/>
+          <a:lstStyle/>
+          <a:p>
+            <a:pPr algn="ctr"/>
+          </a:p>
+        </p:txBody>
+      </p:sp>
+      <p:sp>
+        <p:nvSpPr>
+          <p:cNvPr id="20" name="Rectangle 19"/>
+          <p:cNvSpPr/>
+          <p:nvPr/>
+        </p:nvSpPr>
+        <p:spPr>
+          <a:xfrm>
+            <a:off x="4860036" y="2221991"/>
+            <a:ext cx="3662172" cy="2510027"/>
+          </a:xfrm>
+          <a:prstGeom prst="rect">
+            <a:avLst/>
+          </a:prstGeom>
+          <a:solidFill>
+            <a:srgbClr val="FFFFFF"/>
+          </a:solidFill>
+          <a:ln w="6350">
+            <a:solidFill>
+              <a:srgbClr val="E2E8F0"/>
+            </a:solidFill>
+          </a:ln>
+          <a:effectLst/>
+        </p:spPr>
+        <p:style>
+          <a:lnRef idx="1">
+            <a:schemeClr val="accent1"/>
+          </a:lnRef>
+          <a:fillRef idx="3">
+            <a:schemeClr val="accent1"/>
+          </a:fillRef>
+          <a:effectRef idx="2">
+            <a:schemeClr val="accent1"/>
+          </a:effectRef>
+          <a:fontRef idx="minor">
+            <a:schemeClr val="lt1"/>
+          </a:fontRef>
+        </p:style>
+        <p:txBody>
+          <a:bodyPr rtlCol="0" anchor="ctr"/>
+          <a:lstStyle/>
+          <a:p>
+            <a:pPr algn="ctr"/>
+          </a:p>
+        </p:txBody>
+      </p:sp>
+      <p:sp>
+        <p:nvSpPr>
+          <p:cNvPr id="21" name="TextBox 20"/>
           <p:cNvSpPr txBox="1"/>
           <p:nvPr/>
         </p:nvSpPr>
         <p:spPr>
           <a:xfrm>
-            <a:off x="4805172" y="2441448"/>
-            <a:ext cx="3771900" cy="2121408"/>
+            <a:off x="4914900" y="2240279"/>
+            <a:ext cx="3552444" cy="2473451"/>
           </a:xfrm>
           <a:prstGeom prst="rect">
             <a:avLst/>
@@ -40126,68 +40865,352 @@
           </a:bodyPr>
           <a:lstStyle/>
           <a:p>
-            <a:pPr algn="l">
-              <a:spcAft>
-                <a:spcPts val="300"/>
-              </a:spcAft>
-            </a:pPr>
-            <a:r>
-              <a:rPr sz="1300" b="1">
-                <a:solidFill>
-                  <a:srgbClr val="3730A3"/>
-                </a:solidFill>
-                <a:ea typeface="Sylfaen"/>
-                <a:cs typeface="Sylfaen"/>
-                <a:latin typeface="Sylfaen"/>
-              </a:rPr>
-              <a:t>▸  </a:t>
-            </a:r>
-            <a:r>
-              <a:rPr sz="1300">
+            <a:pPr>
+              <a:spcAft>
+                <a:spcPts val="0"/>
+              </a:spcAft>
+            </a:pPr>
+            <a:r>
+              <a:rPr sz="1000">
                 <a:solidFill>
                   <a:srgbClr val="0F172A"/>
                 </a:solidFill>
-                <a:ea typeface="Sylfaen"/>
-                <a:cs typeface="Sylfaen"/>
-                <a:latin typeface="Sylfaen"/>
-              </a:rPr>
-              <a:t>Validation Rules: საიტის ფორმაში ელფოსტის ველის სავალდებულოობა (Required field);</a:t>
-            </a:r>
-          </a:p>
-          <a:p>
-            <a:pPr algn="l">
-              <a:spcAft>
-                <a:spcPts val="300"/>
-              </a:spcAft>
-            </a:pPr>
-            <a:r>
-              <a:rPr sz="1300" b="1">
-                <a:solidFill>
-                  <a:srgbClr val="3730A3"/>
-                </a:solidFill>
-                <a:ea typeface="Sylfaen"/>
-                <a:cs typeface="Sylfaen"/>
-                <a:latin typeface="Sylfaen"/>
-              </a:rPr>
-              <a:t>▸  </a:t>
-            </a:r>
-            <a:r>
-              <a:rPr sz="1300">
+                <a:ea typeface="Consolas"/>
+                <a:cs typeface="Consolas"/>
+                <a:latin typeface="Consolas"/>
+              </a:rPr>
+              <a:t>მე მაქვს 10-სლაიდიანი</a:t>
+            </a:r>
+          </a:p>
+          <a:p>
+            <a:pPr>
+              <a:spcAft>
+                <a:spcPts val="0"/>
+              </a:spcAft>
+            </a:pPr>
+            <a:r>
+              <a:rPr sz="1000">
                 <a:solidFill>
                   <a:srgbClr val="0F172A"/>
                 </a:solidFill>
-                <a:ea typeface="Sylfaen"/>
-                <a:cs typeface="Sylfaen"/>
-                <a:latin typeface="Sylfaen"/>
-              </a:rPr>
-              <a:t>Error Handling Modules: Make.com-ში შეცდომის მართვის ბლოკების (Ignore, Resume, Break) გამოყენება.</a:t>
-            </a:r>
-          </a:p>
-        </p:txBody>
-      </p:sp>
-      <p:sp>
-        <p:nvSpPr>
-          <p:cNvPr id="17" name="Rectangle 16"/>
+                <a:ea typeface="Consolas"/>
+                <a:cs typeface="Consolas"/>
+                <a:latin typeface="Consolas"/>
+              </a:rPr>
+              <a:t>Pitch Deck-ი: [მოკლე</a:t>
+            </a:r>
+          </a:p>
+          <a:p>
+            <a:pPr>
+              <a:spcAft>
+                <a:spcPts val="0"/>
+              </a:spcAft>
+            </a:pPr>
+            <a:r>
+              <a:rPr sz="1000">
+                <a:solidFill>
+                  <a:srgbClr val="0F172A"/>
+                </a:solidFill>
+                <a:ea typeface="Consolas"/>
+                <a:cs typeface="Consolas"/>
+                <a:latin typeface="Consolas"/>
+              </a:rPr>
+              <a:t>აღწერა].</a:t>
+            </a:r>
+          </a:p>
+          <a:p>
+            <a:pPr>
+              <a:spcAft>
+                <a:spcPts val="0"/>
+              </a:spcAft>
+            </a:pPr>
+            <a:r>
+              <a:rPr sz="1000">
+                <a:solidFill>
+                  <a:srgbClr val="0F172A"/>
+                </a:solidFill>
+                <a:ea typeface="Consolas"/>
+                <a:cs typeface="Consolas"/>
+                <a:latin typeface="Consolas"/>
+              </a:rPr>
+              <a:t>დამიწერე სიტყვა-სიტყვითი</a:t>
+            </a:r>
+          </a:p>
+          <a:p>
+            <a:pPr>
+              <a:spcAft>
+                <a:spcPts val="0"/>
+              </a:spcAft>
+            </a:pPr>
+            <a:r>
+              <a:rPr sz="1000">
+                <a:solidFill>
+                  <a:srgbClr val="0F172A"/>
+                </a:solidFill>
+                <a:ea typeface="Consolas"/>
+                <a:cs typeface="Consolas"/>
+                <a:latin typeface="Consolas"/>
+              </a:rPr>
+              <a:t>სასაუბრო სკრიპტი ქართულად</a:t>
+            </a:r>
+          </a:p>
+          <a:p>
+            <a:pPr>
+              <a:spcAft>
+                <a:spcPts val="0"/>
+              </a:spcAft>
+            </a:pPr>
+            <a:r>
+              <a:rPr sz="1000">
+                <a:solidFill>
+                  <a:srgbClr val="0F172A"/>
+                </a:solidFill>
+                <a:ea typeface="Consolas"/>
+                <a:cs typeface="Consolas"/>
+                <a:latin typeface="Consolas"/>
+              </a:rPr>
+              <a:t>3-წუთიანი გამოსვლისთვის.</a:t>
+            </a:r>
+          </a:p>
+          <a:p>
+            <a:pPr>
+              <a:spcAft>
+                <a:spcPts val="0"/>
+              </a:spcAft>
+            </a:pPr>
+            <a:r>
+              <a:rPr sz="1000">
+                <a:solidFill>
+                  <a:srgbClr val="0F172A"/>
+                </a:solidFill>
+                <a:ea typeface="Consolas"/>
+                <a:cs typeface="Consolas"/>
+                <a:latin typeface="Consolas"/>
+              </a:rPr>
+              <a:t>მოთხოვნები:</a:t>
+            </a:r>
+          </a:p>
+          <a:p>
+            <a:pPr>
+              <a:spcAft>
+                <a:spcPts val="0"/>
+              </a:spcAft>
+            </a:pPr>
+            <a:r>
+              <a:rPr sz="1000">
+                <a:solidFill>
+                  <a:srgbClr val="0F172A"/>
+                </a:solidFill>
+                <a:ea typeface="Consolas"/>
+                <a:cs typeface="Consolas"/>
+                <a:latin typeface="Consolas"/>
+              </a:rPr>
+              <a:t>1. სიტყვების რაოდენობა:</a:t>
+            </a:r>
+          </a:p>
+          <a:p>
+            <a:pPr>
+              <a:spcAft>
+                <a:spcPts val="0"/>
+              </a:spcAft>
+            </a:pPr>
+            <a:r>
+              <a:rPr sz="1000">
+                <a:solidFill>
+                  <a:srgbClr val="0F172A"/>
+                </a:solidFill>
+                <a:ea typeface="Consolas"/>
+                <a:cs typeface="Consolas"/>
+                <a:latin typeface="Consolas"/>
+              </a:rPr>
+              <a:t>ზუსტად 360-380 სიტყვა</a:t>
+            </a:r>
+          </a:p>
+          <a:p>
+            <a:pPr>
+              <a:spcAft>
+                <a:spcPts val="0"/>
+              </a:spcAft>
+            </a:pPr>
+            <a:r>
+              <a:rPr sz="1000">
+                <a:solidFill>
+                  <a:srgbClr val="0F172A"/>
+                </a:solidFill>
+                <a:ea typeface="Consolas"/>
+                <a:cs typeface="Consolas"/>
+                <a:latin typeface="Consolas"/>
+              </a:rPr>
+              <a:t>(სასაუბრო ტემპი).</a:t>
+            </a:r>
+          </a:p>
+          <a:p>
+            <a:pPr>
+              <a:spcAft>
+                <a:spcPts val="0"/>
+              </a:spcAft>
+            </a:pPr>
+            <a:r>
+              <a:rPr sz="1000">
+                <a:solidFill>
+                  <a:srgbClr val="0F172A"/>
+                </a:solidFill>
+                <a:ea typeface="Consolas"/>
+                <a:cs typeface="Consolas"/>
+                <a:latin typeface="Consolas"/>
+              </a:rPr>
+              <a:t>2. მიუთითე როდის გადავრთო</a:t>
+            </a:r>
+          </a:p>
+          <a:p>
+            <a:pPr>
+              <a:spcAft>
+                <a:spcPts val="0"/>
+              </a:spcAft>
+            </a:pPr>
+            <a:r>
+              <a:rPr sz="1000">
+                <a:solidFill>
+                  <a:srgbClr val="0F172A"/>
+                </a:solidFill>
+                <a:ea typeface="Consolas"/>
+                <a:cs typeface="Consolas"/>
+                <a:latin typeface="Consolas"/>
+              </a:rPr>
+              <a:t>სლაიდი (მაგ: [Slide 2:</a:t>
+            </a:r>
+          </a:p>
+          <a:p>
+            <a:pPr>
+              <a:spcAft>
+                <a:spcPts val="0"/>
+              </a:spcAft>
+            </a:pPr>
+            <a:r>
+              <a:rPr sz="1000">
+                <a:solidFill>
+                  <a:srgbClr val="0F172A"/>
+                </a:solidFill>
+                <a:ea typeface="Consolas"/>
+                <a:cs typeface="Consolas"/>
+                <a:latin typeface="Consolas"/>
+              </a:rPr>
+              <a:t>Problem]).</a:t>
+            </a:r>
+          </a:p>
+          <a:p>
+            <a:pPr>
+              <a:spcAft>
+                <a:spcPts val="0"/>
+              </a:spcAft>
+            </a:pPr>
+            <a:r>
+              <a:rPr sz="1000">
+                <a:solidFill>
+                  <a:srgbClr val="0F172A"/>
+                </a:solidFill>
+                <a:ea typeface="Consolas"/>
+                <a:cs typeface="Consolas"/>
+                <a:latin typeface="Consolas"/>
+              </a:rPr>
+              <a:t>3. მონიშნე ემოციური</a:t>
+            </a:r>
+          </a:p>
+          <a:p>
+            <a:pPr>
+              <a:spcAft>
+                <a:spcPts val="0"/>
+              </a:spcAft>
+            </a:pPr>
+            <a:r>
+              <a:rPr sz="1000">
+                <a:solidFill>
+                  <a:srgbClr val="0F172A"/>
+                </a:solidFill>
+                <a:ea typeface="Consolas"/>
+                <a:cs typeface="Consolas"/>
+                <a:latin typeface="Consolas"/>
+              </a:rPr>
+              <a:t>აქცენტები და 2-წამიანი</a:t>
+            </a:r>
+          </a:p>
+          <a:p>
+            <a:pPr>
+              <a:spcAft>
+                <a:spcPts val="0"/>
+              </a:spcAft>
+            </a:pPr>
+            <a:r>
+              <a:rPr sz="1000">
+                <a:solidFill>
+                  <a:srgbClr val="0F172A"/>
+                </a:solidFill>
+                <a:ea typeface="Consolas"/>
+                <a:cs typeface="Consolas"/>
+                <a:latin typeface="Consolas"/>
+              </a:rPr>
+              <a:t>პაუზები.</a:t>
+            </a:r>
+          </a:p>
+          <a:p>
+            <a:pPr>
+              <a:spcAft>
+                <a:spcPts val="0"/>
+              </a:spcAft>
+            </a:pPr>
+            <a:r>
+              <a:rPr sz="1000">
+                <a:solidFill>
+                  <a:srgbClr val="0F172A"/>
+                </a:solidFill>
+                <a:ea typeface="Consolas"/>
+                <a:cs typeface="Consolas"/>
+                <a:latin typeface="Consolas"/>
+              </a:rPr>
+              <a:t>4. ტონი იყოს ენერგიული,</a:t>
+            </a:r>
+          </a:p>
+          <a:p>
+            <a:pPr>
+              <a:spcAft>
+                <a:spcPts val="0"/>
+              </a:spcAft>
+            </a:pPr>
+            <a:r>
+              <a:rPr sz="1000">
+                <a:solidFill>
+                  <a:srgbClr val="0F172A"/>
+                </a:solidFill>
+                <a:ea typeface="Consolas"/>
+                <a:cs typeface="Consolas"/>
+                <a:latin typeface="Consolas"/>
+              </a:rPr>
+              <a:t>დამაჯერებელი, ჟარგონის</a:t>
+            </a:r>
+          </a:p>
+          <a:p>
+            <a:pPr>
+              <a:spcAft>
+                <a:spcPts val="0"/>
+              </a:spcAft>
+            </a:pPr>
+            <a:r>
+              <a:rPr sz="1000">
+                <a:solidFill>
+                  <a:srgbClr val="0F172A"/>
+                </a:solidFill>
+                <a:ea typeface="Consolas"/>
+                <a:cs typeface="Consolas"/>
+                <a:latin typeface="Consolas"/>
+              </a:rPr>
+              <a:t>გარეშე.</a:t>
+            </a:r>
+          </a:p>
+        </p:txBody>
+      </p:sp>
+      <p:sp>
+        <p:nvSpPr>
+          <p:cNvPr id="22" name="Rectangle 21"/>
           <p:cNvSpPr/>
           <p:nvPr/>
         </p:nvSpPr>
@@ -40231,7 +41254,7 @@
       </p:sp>
       <p:sp>
         <p:nvSpPr>
-          <p:cNvPr id="18" name="TextBox 17"/>
+          <p:cNvPr id="23" name="TextBox 22"/>
           <p:cNvSpPr txBox="1"/>
           <p:nvPr/>
         </p:nvSpPr>
@@ -47910,7 +48933,7 @@
                 <a:cs typeface="Sylfaen"/>
                 <a:latin typeface="Sylfaen"/>
               </a:rPr>
-              <a:t>[ ] Make.com სცენარი აქტიურია;</a:t>
+              <a:t>[ ] 10-სლაიდიანი Pitch Deck-ი მზადაა Gamma-ში;</a:t>
             </a:r>
           </a:p>
           <a:p>

--- a/GITA/Pre-Acceleration/2026-5h-AI-for-Startups/day2-slides.pptx
+++ b/GITA/Pre-Acceleration/2026-5h-AI-for-Startups/day2-slides.pptx
@@ -33344,7 +33344,7 @@
                 <a:cs typeface="Consolas"/>
                 <a:latin typeface="Consolas"/>
               </a:rPr>
-              <a:t>"gemini-1.5-flash",</a:t>
+              <a:t>"gemini-flash",</a:t>
             </a:r>
           </a:p>
           <a:p>
@@ -51528,7 +51528,7 @@
                 <a:cs typeface="Sylfaen"/>
                 <a:latin typeface="Sylfaen"/>
               </a:rPr>
-              <a:t>შენ ხარ წამყვანი ქოპირაიტერი, რომელიც სპეციალიზებულია ტექნოლოგიური სტარტაპების სარეკლამო კამპანიებზე. ჩემი სტარტაპია: [მაგალითად: Compliance Copilot - AI-ასისტენტი ფინანსური ორგანიზაციებისთვის AML/CFT პროცესების ავტომატიზაციისთვის]. დამიწერე სარეკლამო მასალები შემდეგი ფორმატით: 1. **Landing Page-ის Hero Section ტექსტი:** - 1 მიმზიდველი სათაური (Hook / UVP) - 1 დამხმარე ქვესათაური (Sub-headline) - 1 მკაფიო მოქმედებისკენ მოწოდება (Call to Action - CTA) 2. **AIDA მოდელის Facebook პოსტი (Attention, Interest, Desire, Action):** - შექმენი პოსტი, რომელიც მიიპყრობს ყურადღებას პირველივე ხაზით, გააღვიძებს ინტერესს ფაქტებით, აღძრავს სურვილს სარგებლით და მოუწოდებს დარეგისტრირებისკენ. 3. **PAS მოდელის LinkedIn პოსტი (Problem, Agitate, Solve):** - შექმენი პოსტი B2B აუდიტორიისთვის, რომელიც იწყება რეალური ბიზნეს-ტკივილით (Compliance რუტინა, ჯარიმების რისკი), ამძაფრებს მას ემოციურად/ფინანსურად და ბოლოს სთავაზობს Compliance Copilot-ს, როგორც მარტივ ხსნას. ტონი შეინარჩუნე ბიზნეს-კომპეტენტური, მაგრამ თანამედროვე. გამოიყენე ემოჯიები ზომიერად.</a:t>
+              <a:t>შენ ხარ წამყვანი ქოპირაიტერი, რომელიც სპეციალიზებულია ტექნოლოგიური სტარტაპების სარეკლამო კამპანიებზე. ჩემი სტარტაპია: [მაგალითად: Flexi - ციფრული ინფრასტრუქტურა და marketplace ფიტნეს დარბაზებისთვის (ავტომატური გადახდები და წევრების შენარჩუნება)]. დამიწერე სარეკლამო მასალები შემდეგი ფორმატით: 1. **Landing Page-ის Hero Section ტექსტი:** - 1 მიმზიდველი სათაური (Hook / UVP) - 1 დამხმარე ქვესათაური (Sub-headline) - 1 მკაფიო მოქმედებისკენ მოწოდება (Call to Action - CTA) 2. **AIDA მოდელის Facebook პოსტი (Attention, Interest, Desire, Action):** - შექმენი პოსტი, რომელიც მიიპყრობს ყურადღებას პირველივე ხაზით, გააღვიძებს ინტერესს ფაქტებით, აღძრავს სურვილს სარგებლით და მოუწოდებს დარეგისტრირებისკენ. 3. **PAS მოდელის LinkedIn პოსტი (Problem, Agitate, Solve):** - შექმენი პოსტი დარბაზების მფლობელებისთვის, რომელიც იწყება რეალური ბიზნეს-ტკივილით (გადაუხდელი აბონემენტები, წევრების ჩუმი გადინება და ხელით რვეულში ჩაწერა), ამძაფრებს მას დაკარგული შემოსავლის კუთხით და ბოლოს სთავაზობს Flexi-ს, როგორც მარტივ ავტომატურ გადაწყვეტას. ტონი შეინარჩუნე ბიზნეს-კომპეტენტური, მაგრამ თანამედროვე. გამოიყენე ემოჯიები ზომიერად.</a:t>
             </a:r>
           </a:p>
         </p:txBody>
